--- a/static/ppts/G8_Sci_Ecosystems.pptx
+++ b/static/ppts/G8_Sci_Ecosystems.pptx
@@ -10,9 +10,12 @@
     <p:sldId id="258" r:id="rId4"/>
     <p:sldId id="259" r:id="rId5"/>
     <p:sldId id="260" r:id="rId6"/>
+    <p:sldId id="261" r:id="rId7"/>
+    <p:sldId id="262" r:id="rId8"/>
+    <p:sldId id="263" r:id="rId9"/>
   </p:sldIdLst>
   <p:notesMasterIdLst>
-    <p:notesMasterId r:id="rId7"/>
+    <p:notesMasterId r:id="rId10"/>
   </p:notesMasterIdLst>
   <p:sldSz cx="9144000" cy="5143500"/>
   <p:notesSz cx="5143500" cy="9144000"/>
@@ -882,6 +885,270 @@
             <a:fld id="{F7021451-1387-4CA6-816F-3879F97B5CBC}" type="slidenum">
               <a:rPr lang="en-US"/>
               <a:t>5</a:t>
+            </a:fld>
+            <a:endParaRPr lang="en-US"/>
+          </a:p>
+        </p:txBody>
+      </p:sp>
+    </p:spTree>
+    <p:extLst>
+      <p:ext uri="{BB962C8B-B14F-4D97-AF65-F5344CB8AC3E}">
+        <p14:creationId xmlns:p14="http://schemas.microsoft.com/office/powerpoint/2010/main" val="1024086991"/>
+      </p:ext>
+    </p:extLst>
+  </p:cSld>
+  <p:clrMapOvr>
+    <a:masterClrMapping/>
+  </p:clrMapOvr>
+</p:notes>
+</file>
+
+<file path=ppt/notesSlides/notesSlide6.xml><?xml version="1.0" encoding="utf-8"?>
+<p:notes xmlns:a="http://schemas.openxmlformats.org/drawingml/2006/main" xmlns:r="http://schemas.openxmlformats.org/officeDocument/2006/relationships" xmlns:p="http://schemas.openxmlformats.org/presentationml/2006/main">
+  <p:cSld>
+    <p:spTree>
+      <p:nvGrpSpPr>
+        <p:cNvPr id="1" name=""/>
+        <p:cNvGrpSpPr/>
+        <p:nvPr/>
+      </p:nvGrpSpPr>
+      <p:grpSpPr>
+        <a:xfrm>
+          <a:off x="0" y="0"/>
+          <a:ext cx="0" cy="0"/>
+          <a:chOff x="0" y="0"/>
+          <a:chExt cx="0" cy="0"/>
+        </a:xfrm>
+      </p:grpSpPr>
+      <p:sp>
+        <p:nvSpPr>
+          <p:cNvPr id="2" name="Slide Image Placeholder 1"/>
+          <p:cNvSpPr>
+            <a:spLocks noGrp="1" noRot="1" noChangeAspect="1"/>
+          </p:cNvSpPr>
+          <p:nvPr>
+            <p:ph type="sldImg"/>
+          </p:nvPr>
+        </p:nvSpPr>
+        <p:spPr/>
+      </p:sp>
+      <p:sp>
+        <p:nvSpPr>
+          <p:cNvPr id="3" name="Notes Placeholder 2"/>
+          <p:cNvSpPr>
+            <a:spLocks noGrp="1"/>
+          </p:cNvSpPr>
+          <p:nvPr>
+            <p:ph type="body" idx="1"/>
+          </p:nvPr>
+        </p:nvSpPr>
+        <p:spPr/>
+        <p:txBody>
+          <a:bodyPr/>
+          <a:lstStyle/>
+          <a:p>
+            <a:r>
+              <a:rPr lang="en-US" dirty="0"/>
+              <a:t/>
+            </a:r>
+            <a:endParaRPr lang="en-US" dirty="0"/>
+          </a:p>
+        </p:txBody>
+      </p:sp>
+      <p:sp>
+        <p:nvSpPr>
+          <p:cNvPr id="4" name="Slide Number Placeholder 3"/>
+          <p:cNvSpPr>
+            <a:spLocks noGrp="1"/>
+          </p:cNvSpPr>
+          <p:nvPr>
+            <p:ph type="sldNum" sz="quarter" idx="10"/>
+          </p:nvPr>
+        </p:nvSpPr>
+        <p:spPr/>
+        <p:txBody>
+          <a:bodyPr/>
+          <a:lstStyle/>
+          <a:p>
+            <a:fld id="{F7021451-1387-4CA6-816F-3879F97B5CBC}" type="slidenum">
+              <a:rPr lang="en-US"/>
+              <a:t>6</a:t>
+            </a:fld>
+            <a:endParaRPr lang="en-US"/>
+          </a:p>
+        </p:txBody>
+      </p:sp>
+    </p:spTree>
+    <p:extLst>
+      <p:ext uri="{BB962C8B-B14F-4D97-AF65-F5344CB8AC3E}">
+        <p14:creationId xmlns:p14="http://schemas.microsoft.com/office/powerpoint/2010/main" val="1024086991"/>
+      </p:ext>
+    </p:extLst>
+  </p:cSld>
+  <p:clrMapOvr>
+    <a:masterClrMapping/>
+  </p:clrMapOvr>
+</p:notes>
+</file>
+
+<file path=ppt/notesSlides/notesSlide7.xml><?xml version="1.0" encoding="utf-8"?>
+<p:notes xmlns:a="http://schemas.openxmlformats.org/drawingml/2006/main" xmlns:r="http://schemas.openxmlformats.org/officeDocument/2006/relationships" xmlns:p="http://schemas.openxmlformats.org/presentationml/2006/main">
+  <p:cSld>
+    <p:spTree>
+      <p:nvGrpSpPr>
+        <p:cNvPr id="1" name=""/>
+        <p:cNvGrpSpPr/>
+        <p:nvPr/>
+      </p:nvGrpSpPr>
+      <p:grpSpPr>
+        <a:xfrm>
+          <a:off x="0" y="0"/>
+          <a:ext cx="0" cy="0"/>
+          <a:chOff x="0" y="0"/>
+          <a:chExt cx="0" cy="0"/>
+        </a:xfrm>
+      </p:grpSpPr>
+      <p:sp>
+        <p:nvSpPr>
+          <p:cNvPr id="2" name="Slide Image Placeholder 1"/>
+          <p:cNvSpPr>
+            <a:spLocks noGrp="1" noRot="1" noChangeAspect="1"/>
+          </p:cNvSpPr>
+          <p:nvPr>
+            <p:ph type="sldImg"/>
+          </p:nvPr>
+        </p:nvSpPr>
+        <p:spPr/>
+      </p:sp>
+      <p:sp>
+        <p:nvSpPr>
+          <p:cNvPr id="3" name="Notes Placeholder 2"/>
+          <p:cNvSpPr>
+            <a:spLocks noGrp="1"/>
+          </p:cNvSpPr>
+          <p:nvPr>
+            <p:ph type="body" idx="1"/>
+          </p:nvPr>
+        </p:nvSpPr>
+        <p:spPr/>
+        <p:txBody>
+          <a:bodyPr/>
+          <a:lstStyle/>
+          <a:p>
+            <a:r>
+              <a:rPr lang="en-US" dirty="0"/>
+              <a:t/>
+            </a:r>
+            <a:endParaRPr lang="en-US" dirty="0"/>
+          </a:p>
+        </p:txBody>
+      </p:sp>
+      <p:sp>
+        <p:nvSpPr>
+          <p:cNvPr id="4" name="Slide Number Placeholder 3"/>
+          <p:cNvSpPr>
+            <a:spLocks noGrp="1"/>
+          </p:cNvSpPr>
+          <p:nvPr>
+            <p:ph type="sldNum" sz="quarter" idx="10"/>
+          </p:nvPr>
+        </p:nvSpPr>
+        <p:spPr/>
+        <p:txBody>
+          <a:bodyPr/>
+          <a:lstStyle/>
+          <a:p>
+            <a:fld id="{F7021451-1387-4CA6-816F-3879F97B5CBC}" type="slidenum">
+              <a:rPr lang="en-US"/>
+              <a:t>7</a:t>
+            </a:fld>
+            <a:endParaRPr lang="en-US"/>
+          </a:p>
+        </p:txBody>
+      </p:sp>
+    </p:spTree>
+    <p:extLst>
+      <p:ext uri="{BB962C8B-B14F-4D97-AF65-F5344CB8AC3E}">
+        <p14:creationId xmlns:p14="http://schemas.microsoft.com/office/powerpoint/2010/main" val="1024086991"/>
+      </p:ext>
+    </p:extLst>
+  </p:cSld>
+  <p:clrMapOvr>
+    <a:masterClrMapping/>
+  </p:clrMapOvr>
+</p:notes>
+</file>
+
+<file path=ppt/notesSlides/notesSlide8.xml><?xml version="1.0" encoding="utf-8"?>
+<p:notes xmlns:a="http://schemas.openxmlformats.org/drawingml/2006/main" xmlns:r="http://schemas.openxmlformats.org/officeDocument/2006/relationships" xmlns:p="http://schemas.openxmlformats.org/presentationml/2006/main">
+  <p:cSld>
+    <p:spTree>
+      <p:nvGrpSpPr>
+        <p:cNvPr id="1" name=""/>
+        <p:cNvGrpSpPr/>
+        <p:nvPr/>
+      </p:nvGrpSpPr>
+      <p:grpSpPr>
+        <a:xfrm>
+          <a:off x="0" y="0"/>
+          <a:ext cx="0" cy="0"/>
+          <a:chOff x="0" y="0"/>
+          <a:chExt cx="0" cy="0"/>
+        </a:xfrm>
+      </p:grpSpPr>
+      <p:sp>
+        <p:nvSpPr>
+          <p:cNvPr id="2" name="Slide Image Placeholder 1"/>
+          <p:cNvSpPr>
+            <a:spLocks noGrp="1" noRot="1" noChangeAspect="1"/>
+          </p:cNvSpPr>
+          <p:nvPr>
+            <p:ph type="sldImg"/>
+          </p:nvPr>
+        </p:nvSpPr>
+        <p:spPr/>
+      </p:sp>
+      <p:sp>
+        <p:nvSpPr>
+          <p:cNvPr id="3" name="Notes Placeholder 2"/>
+          <p:cNvSpPr>
+            <a:spLocks noGrp="1"/>
+          </p:cNvSpPr>
+          <p:nvPr>
+            <p:ph type="body" idx="1"/>
+          </p:nvPr>
+        </p:nvSpPr>
+        <p:spPr/>
+        <p:txBody>
+          <a:bodyPr/>
+          <a:lstStyle/>
+          <a:p>
+            <a:r>
+              <a:rPr lang="en-US" dirty="0"/>
+              <a:t/>
+            </a:r>
+            <a:endParaRPr lang="en-US" dirty="0"/>
+          </a:p>
+        </p:txBody>
+      </p:sp>
+      <p:sp>
+        <p:nvSpPr>
+          <p:cNvPr id="4" name="Slide Number Placeholder 3"/>
+          <p:cNvSpPr>
+            <a:spLocks noGrp="1"/>
+          </p:cNvSpPr>
+          <p:nvPr>
+            <p:ph type="sldNum" sz="quarter" idx="10"/>
+          </p:nvPr>
+        </p:nvSpPr>
+        <p:spPr/>
+        <p:txBody>
+          <a:bodyPr/>
+          <a:lstStyle/>
+          <a:p>
+            <a:fld id="{F7021451-1387-4CA6-816F-3879F97B5CBC}" type="slidenum">
+              <a:rPr lang="en-US"/>
+              <a:t>8</a:t>
             </a:fld>
             <a:endParaRPr lang="en-US"/>
           </a:p>
@@ -1259,7 +1526,7 @@
             <a:avLst/>
           </a:prstGeom>
           <a:solidFill>
-            <a:srgbClr val="1B2A4A"/>
+            <a:srgbClr val="E9C46A"/>
           </a:solidFill>
           <a:ln/>
         </p:spPr>
@@ -1291,7 +1558,7 @@
             <a:r>
               <a:rPr lang="en-US" sz="1400" b="1" spc="400" kern="0" dirty="0">
                 <a:solidFill>
-                  <a:srgbClr val="1B2A4A"/>
+                  <a:srgbClr val="E9C46A"/>
                 </a:solidFill>
                 <a:latin typeface="Calibri" pitchFamily="34" charset="0"/>
                 <a:ea typeface="Calibri" pitchFamily="34" charset="-122"/>
@@ -1336,38 +1603,55 @@
                 <a:ea typeface="Georgia" pitchFamily="34" charset="-122"/>
                 <a:cs typeface="Georgia" pitchFamily="34" charset="-120"/>
               </a:rPr>
-              <a:t>What Is an Ecosystem?</a:t>
+              <a:t>What Is an</a:t>
             </a:r>
             <a:endParaRPr lang="en-US" sz="4000" dirty="0"/>
           </a:p>
-        </p:txBody>
-      </p:sp>
-      <p:sp>
-        <p:nvSpPr>
-          <p:cNvPr id="6" name="Text 4"/>
-          <p:cNvSpPr/>
-          <p:nvPr/>
-        </p:nvSpPr>
-        <p:spPr>
-          <a:xfrm>
-            <a:off x="731520" y="3200400"/>
-            <a:ext cx="7680960" cy="548640"/>
-          </a:xfrm>
-          <a:prstGeom prst="rect">
-            <a:avLst/>
-          </a:prstGeom>
-          <a:noFill/>
-          <a:ln/>
-        </p:spPr>
-        <p:txBody>
-          <a:bodyPr wrap="square" rtlCol="0" anchor="ctr"/>
-          <a:lstStyle/>
           <a:p>
             <a:pPr indent="0" marL="0">
               <a:buNone/>
             </a:pPr>
             <a:r>
-              <a:rPr lang="en-US" sz="1600" dirty="0">
+              <a:rPr lang="en-US" sz="4000" b="1" dirty="0">
+                <a:solidFill>
+                  <a:srgbClr val="FFFFFF"/>
+                </a:solidFill>
+                <a:latin typeface="Georgia" pitchFamily="34" charset="0"/>
+                <a:ea typeface="Georgia" pitchFamily="34" charset="-122"/>
+                <a:cs typeface="Georgia" pitchFamily="34" charset="-120"/>
+              </a:rPr>
+              <a:t>Ecosystem?</a:t>
+            </a:r>
+            <a:endParaRPr lang="en-US" sz="4000" dirty="0"/>
+          </a:p>
+        </p:txBody>
+      </p:sp>
+      <p:sp>
+        <p:nvSpPr>
+          <p:cNvPr id="6" name="Text 4"/>
+          <p:cNvSpPr/>
+          <p:nvPr/>
+        </p:nvSpPr>
+        <p:spPr>
+          <a:xfrm>
+            <a:off x="731520" y="3200400"/>
+            <a:ext cx="7680960" cy="548640"/>
+          </a:xfrm>
+          <a:prstGeom prst="rect">
+            <a:avLst/>
+          </a:prstGeom>
+          <a:noFill/>
+          <a:ln/>
+        </p:spPr>
+        <p:txBody>
+          <a:bodyPr wrap="square" rtlCol="0" anchor="ctr"/>
+          <a:lstStyle/>
+          <a:p>
+            <a:pPr indent="0" marL="0">
+              <a:buNone/>
+            </a:pPr>
+            <a:r>
+              <a:rPr lang="en-US" sz="1600" i="1" dirty="0">
                 <a:solidFill>
                   <a:srgbClr val="9B9690"/>
                 </a:solidFill>
@@ -1375,7 +1659,7 @@
                 <a:ea typeface="Calibri" pitchFamily="34" charset="-122"/>
                 <a:cs typeface="Calibri" pitchFamily="34" charset="-120"/>
               </a:rPr>
-              <a:t>Living and non-living things interacting together</a:t>
+              <a:t>Living and non-living things working together</a:t>
             </a:r>
             <a:endParaRPr lang="en-US" sz="1600" dirty="0"/>
           </a:p>
@@ -1406,7 +1690,7 @@
               <a:buNone/>
             </a:pPr>
             <a:r>
-              <a:rPr lang="en-US" sz="1100" dirty="0">
+              <a:rPr lang="en-US" sz="1200" dirty="0">
                 <a:solidFill>
                   <a:srgbClr val="6B6660"/>
                 </a:solidFill>
@@ -1414,9 +1698,9 @@
                 <a:ea typeface="Calibri" pitchFamily="34" charset="-122"/>
                 <a:cs typeface="Calibri" pitchFamily="34" charset="-120"/>
               </a:rPr>
-              <a:t>Mr Zocchi · NIS</a:t>
-            </a:r>
-            <a:endParaRPr lang="en-US" sz="1100" dirty="0"/>
+              <a:t>Mr Zocchi</a:t>
+            </a:r>
+            <a:endParaRPr lang="en-US" sz="1200" dirty="0"/>
           </a:p>
         </p:txBody>
       </p:sp>
@@ -1460,41 +1744,21 @@
             <a:avLst/>
           </a:prstGeom>
           <a:solidFill>
-            <a:srgbClr val="FAF8F5"/>
+            <a:srgbClr val="111D35"/>
           </a:solidFill>
           <a:ln/>
         </p:spPr>
       </p:sp>
       <p:sp>
         <p:nvSpPr>
-          <p:cNvPr id="3" name="Shape 1"/>
-          <p:cNvSpPr/>
-          <p:nvPr/>
-        </p:nvSpPr>
-        <p:spPr>
-          <a:xfrm>
-            <a:off x="0" y="0"/>
-            <a:ext cx="9144000" cy="54864"/>
-          </a:xfrm>
-          <a:prstGeom prst="rect">
-            <a:avLst/>
-          </a:prstGeom>
-          <a:solidFill>
-            <a:srgbClr val="1B2A4A"/>
-          </a:solidFill>
-          <a:ln/>
-        </p:spPr>
-      </p:sp>
-      <p:sp>
-        <p:nvSpPr>
-          <p:cNvPr id="4" name="Text 2"/>
-          <p:cNvSpPr/>
-          <p:nvPr/>
-        </p:nvSpPr>
-        <p:spPr>
-          <a:xfrm>
-            <a:off x="640080" y="320040"/>
-            <a:ext cx="7863840" cy="640080"/>
+          <p:cNvPr id="3" name="Text 1"/>
+          <p:cNvSpPr/>
+          <p:nvPr/>
+        </p:nvSpPr>
+        <p:spPr>
+          <a:xfrm>
+            <a:off x="6858000" y="182880"/>
+            <a:ext cx="2286000" cy="2743200"/>
           </a:xfrm>
           <a:prstGeom prst="rect">
             <a:avLst/>
@@ -1503,37 +1767,39 @@
           <a:ln/>
         </p:spPr>
         <p:txBody>
-          <a:bodyPr wrap="square" lIns="0" tIns="0" rIns="0" bIns="0" rtlCol="0" anchor="ctr"/>
+          <a:bodyPr wrap="square" rtlCol="0" anchor="ctr"/>
           <a:lstStyle/>
           <a:p>
-            <a:pPr indent="0" marL="0">
+            <a:pPr algn="ctr" indent="0" marL="0">
               <a:buNone/>
             </a:pPr>
             <a:r>
-              <a:rPr lang="en-US" sz="2600" b="1" dirty="0">
+              <a:rPr lang="en-US" sz="16000" b="1" dirty="0">
                 <a:solidFill>
-                  <a:srgbClr val="1B2A4A"/>
+                  <a:srgbClr val="E9C46A">
+                    <a:alpha val="80000"/>
+                  </a:srgbClr>
                 </a:solidFill>
                 <a:latin typeface="Georgia" pitchFamily="34" charset="0"/>
                 <a:ea typeface="Georgia" pitchFamily="34" charset="-122"/>
                 <a:cs typeface="Georgia" pitchFamily="34" charset="-120"/>
               </a:rPr>
-              <a:t>Defining an Ecosystem</a:t>
-            </a:r>
-            <a:endParaRPr lang="en-US" sz="2600" dirty="0"/>
-          </a:p>
-        </p:txBody>
-      </p:sp>
-      <p:sp>
-        <p:nvSpPr>
-          <p:cNvPr id="5" name="Text 3"/>
-          <p:cNvSpPr/>
-          <p:nvPr/>
-        </p:nvSpPr>
-        <p:spPr>
-          <a:xfrm>
-            <a:off x="640080" y="1188720"/>
-            <a:ext cx="7863840" cy="3200400"/>
+              <a:t>?</a:t>
+            </a:r>
+            <a:endParaRPr lang="en-US" sz="16000" dirty="0"/>
+          </a:p>
+        </p:txBody>
+      </p:sp>
+      <p:sp>
+        <p:nvSpPr>
+          <p:cNvPr id="4" name="Text 2"/>
+          <p:cNvSpPr/>
+          <p:nvPr/>
+        </p:nvSpPr>
+        <p:spPr>
+          <a:xfrm>
+            <a:off x="731520" y="548640"/>
+            <a:ext cx="2743200" cy="365760"/>
           </a:xfrm>
           <a:prstGeom prst="rect">
             <a:avLst/>
@@ -1542,91 +1808,246 @@
           <a:ln/>
         </p:spPr>
         <p:txBody>
-          <a:bodyPr wrap="square" rtlCol="0" anchor="t"/>
+          <a:bodyPr wrap="square" rtlCol="0" anchor="ctr"/>
           <a:lstStyle/>
           <a:p>
-            <a:pPr marL="342900" indent="-342900">
-              <a:lnSpc>
-                <a:spcPct val="140000"/>
-              </a:lnSpc>
-              <a:buSzPct val="100000"/>
-              <a:buChar char="•"/>
+            <a:pPr indent="0" marL="0">
+              <a:buNone/>
             </a:pPr>
             <a:r>
-              <a:rPr lang="en-US" sz="1500" dirty="0">
+              <a:rPr lang="en-US" sz="1200" b="1" spc="400" kern="0" dirty="0">
                 <a:solidFill>
-                  <a:srgbClr val="3D3A36"/>
+                  <a:srgbClr val="E9C46A"/>
                 </a:solidFill>
                 <a:latin typeface="Calibri" pitchFamily="34" charset="0"/>
                 <a:ea typeface="Calibri" pitchFamily="34" charset="-122"/>
                 <a:cs typeface="Calibri" pitchFamily="34" charset="-120"/>
               </a:rPr>
-              <a:t>An ecosystem = community of living organisms + their non-living environment.</a:t>
-            </a:r>
-            <a:endParaRPr lang="en-US" sz="1500" dirty="0"/>
-          </a:p>
-          <a:p>
-            <a:pPr marL="342900" indent="-342900">
-              <a:lnSpc>
-                <a:spcPct val="140000"/>
-              </a:lnSpc>
-              <a:buSzPct val="100000"/>
-              <a:buChar char="•"/>
+              <a:t>INQUIRY</a:t>
+            </a:r>
+            <a:endParaRPr lang="en-US" sz="1200" dirty="0"/>
+          </a:p>
+        </p:txBody>
+      </p:sp>
+      <p:sp>
+        <p:nvSpPr>
+          <p:cNvPr id="5" name="Text 3"/>
+          <p:cNvSpPr/>
+          <p:nvPr/>
+        </p:nvSpPr>
+        <p:spPr>
+          <a:xfrm>
+            <a:off x="731520" y="1005840"/>
+            <a:ext cx="6858000" cy="1463040"/>
+          </a:xfrm>
+          <a:prstGeom prst="rect">
+            <a:avLst/>
+          </a:prstGeom>
+          <a:noFill/>
+          <a:ln/>
+        </p:spPr>
+        <p:txBody>
+          <a:bodyPr wrap="square" rtlCol="0" anchor="t"/>
+          <a:lstStyle/>
+          <a:p>
+            <a:pPr indent="0" marL="0">
+              <a:buNone/>
             </a:pPr>
             <a:r>
-              <a:rPr lang="en-US" sz="1500" dirty="0">
+              <a:rPr lang="en-US" sz="2800" b="1" dirty="0">
                 <a:solidFill>
-                  <a:srgbClr val="3D3A36"/>
+                  <a:srgbClr val="FFFFFF"/>
+                </a:solidFill>
+                <a:latin typeface="Georgia" pitchFamily="34" charset="0"/>
+                <a:ea typeface="Georgia" pitchFamily="34" charset="-122"/>
+                <a:cs typeface="Georgia" pitchFamily="34" charset="-120"/>
+              </a:rPr>
+              <a:t>Xuanwu Lake (玄武湖) is in the middle of Nanjing. What makes it an ecosystem, not just a lake?</a:t>
+            </a:r>
+            <a:endParaRPr lang="en-US" sz="2800" dirty="0"/>
+          </a:p>
+        </p:txBody>
+      </p:sp>
+      <p:sp>
+        <p:nvSpPr>
+          <p:cNvPr id="6" name="Text 4"/>
+          <p:cNvSpPr/>
+          <p:nvPr/>
+        </p:nvSpPr>
+        <p:spPr>
+          <a:xfrm>
+            <a:off x="731520" y="2560320"/>
+            <a:ext cx="6858000" cy="548640"/>
+          </a:xfrm>
+          <a:prstGeom prst="rect">
+            <a:avLst/>
+          </a:prstGeom>
+          <a:noFill/>
+          <a:ln/>
+        </p:spPr>
+        <p:txBody>
+          <a:bodyPr wrap="square" rtlCol="0" anchor="ctr"/>
+          <a:lstStyle/>
+          <a:p>
+            <a:pPr indent="0" marL="0">
+              <a:buNone/>
+            </a:pPr>
+            <a:r>
+              <a:rPr lang="en-US" sz="1400" i="1" dirty="0">
+                <a:solidFill>
+                  <a:srgbClr val="9B9690"/>
                 </a:solidFill>
                 <a:latin typeface="Calibri" pitchFamily="34" charset="0"/>
                 <a:ea typeface="Calibri" pitchFamily="34" charset="-122"/>
                 <a:cs typeface="Calibri" pitchFamily="34" charset="-120"/>
               </a:rPr>
-              <a:t>It includes both biotic (living) and abiotic (non-living) factors.</a:t>
-            </a:r>
-            <a:endParaRPr lang="en-US" sz="1500" dirty="0"/>
-          </a:p>
-          <a:p>
-            <a:pPr marL="342900" indent="-342900">
-              <a:lnSpc>
-                <a:spcPct val="140000"/>
-              </a:lnSpc>
-              <a:buSzPct val="100000"/>
-              <a:buChar char="•"/>
+              <a:t>An ecosystem includes BOTH living things AND their non-living environment.</a:t>
+            </a:r>
+            <a:endParaRPr lang="en-US" sz="1400" dirty="0"/>
+          </a:p>
+        </p:txBody>
+      </p:sp>
+      <p:sp>
+        <p:nvSpPr>
+          <p:cNvPr id="7" name="Shape 5"/>
+          <p:cNvSpPr/>
+          <p:nvPr/>
+        </p:nvSpPr>
+        <p:spPr>
+          <a:xfrm>
+            <a:off x="548640" y="3200400"/>
+            <a:ext cx="7315200" cy="1645920"/>
+          </a:xfrm>
+          <a:prstGeom prst="rect">
+            <a:avLst/>
+          </a:prstGeom>
+          <a:solidFill>
+            <a:srgbClr val="243660"/>
+          </a:solidFill>
+          <a:ln/>
+        </p:spPr>
+      </p:sp>
+      <p:sp>
+        <p:nvSpPr>
+          <p:cNvPr id="8" name="Text 6"/>
+          <p:cNvSpPr/>
+          <p:nvPr/>
+        </p:nvSpPr>
+        <p:spPr>
+          <a:xfrm>
+            <a:off x="731520" y="3246120"/>
+            <a:ext cx="3657600" cy="320040"/>
+          </a:xfrm>
+          <a:prstGeom prst="rect">
+            <a:avLst/>
+          </a:prstGeom>
+          <a:noFill/>
+          <a:ln/>
+        </p:spPr>
+        <p:txBody>
+          <a:bodyPr wrap="square" rtlCol="0" anchor="ctr"/>
+          <a:lstStyle/>
+          <a:p>
+            <a:pPr indent="0" marL="0">
+              <a:buNone/>
             </a:pPr>
             <a:r>
-              <a:rPr lang="en-US" sz="1500" dirty="0">
+              <a:rPr lang="en-US" sz="1100" b="1" spc="200" kern="0" dirty="0">
                 <a:solidFill>
-                  <a:srgbClr val="3D3A36"/>
+                  <a:srgbClr val="E9C46A"/>
                 </a:solidFill>
                 <a:latin typeface="Calibri" pitchFamily="34" charset="0"/>
                 <a:ea typeface="Calibri" pitchFamily="34" charset="-122"/>
                 <a:cs typeface="Calibri" pitchFamily="34" charset="-120"/>
               </a:rPr>
-              <a:t>Ecosystems can be large (ocean) or small (puddle).</a:t>
-            </a:r>
-            <a:endParaRPr lang="en-US" sz="1500" dirty="0"/>
-          </a:p>
+              <a:t>Think — Pair — Share</a:t>
+            </a:r>
+            <a:endParaRPr lang="en-US" sz="1100" dirty="0"/>
+          </a:p>
+        </p:txBody>
+      </p:sp>
+      <p:sp>
+        <p:nvSpPr>
+          <p:cNvPr id="9" name="Text 7"/>
+          <p:cNvSpPr/>
+          <p:nvPr/>
+        </p:nvSpPr>
+        <p:spPr>
+          <a:xfrm>
+            <a:off x="731520" y="3566160"/>
+            <a:ext cx="6949440" cy="1188720"/>
+          </a:xfrm>
+          <a:prstGeom prst="rect">
+            <a:avLst/>
+          </a:prstGeom>
+          <a:noFill/>
+          <a:ln/>
+        </p:spPr>
+        <p:txBody>
+          <a:bodyPr wrap="square" rtlCol="0" anchor="ctr"/>
+          <a:lstStyle/>
           <a:p>
             <a:pPr marL="342900" indent="-342900">
-              <a:lnSpc>
-                <a:spcPct val="140000"/>
-              </a:lnSpc>
+              <a:spcAft>
+                <a:spcPts val="600"/>
+              </a:spcAft>
               <a:buSzPct val="100000"/>
               <a:buChar char="•"/>
             </a:pPr>
             <a:r>
-              <a:rPr lang="en-US" sz="1500" dirty="0">
+              <a:rPr lang="en-US" sz="1400" dirty="0">
                 <a:solidFill>
-                  <a:srgbClr val="3D3A36"/>
+                  <a:srgbClr val="E5E2DC"/>
                 </a:solidFill>
                 <a:latin typeface="Calibri" pitchFamily="34" charset="0"/>
                 <a:ea typeface="Calibri" pitchFamily="34" charset="-122"/>
                 <a:cs typeface="Calibri" pitchFamily="34" charset="-120"/>
               </a:rPr>
-              <a:t>All parts of an ecosystem are interconnected.</a:t>
-            </a:r>
-            <a:endParaRPr lang="en-US" sz="1500" dirty="0"/>
+              <a:t>What living things would you find in Xuanwu Lake?</a:t>
+            </a:r>
+            <a:endParaRPr lang="en-US" sz="1400" dirty="0"/>
+          </a:p>
+          <a:p>
+            <a:pPr marL="342900" indent="-342900">
+              <a:spcAft>
+                <a:spcPts val="600"/>
+              </a:spcAft>
+              <a:buSzPct val="100000"/>
+              <a:buChar char="•"/>
+            </a:pPr>
+            <a:r>
+              <a:rPr lang="en-US" sz="1400" dirty="0">
+                <a:solidFill>
+                  <a:srgbClr val="E5E2DC"/>
+                </a:solidFill>
+                <a:latin typeface="Calibri" pitchFamily="34" charset="0"/>
+                <a:ea typeface="Calibri" pitchFamily="34" charset="-122"/>
+                <a:cs typeface="Calibri" pitchFamily="34" charset="-120"/>
+              </a:rPr>
+              <a:t>What non-living factors affect the organisms there?</a:t>
+            </a:r>
+            <a:endParaRPr lang="en-US" sz="1400" dirty="0"/>
+          </a:p>
+          <a:p>
+            <a:pPr marL="342900" indent="-342900">
+              <a:spcAft>
+                <a:spcPts val="600"/>
+              </a:spcAft>
+              <a:buSzPct val="100000"/>
+              <a:buChar char="•"/>
+            </a:pPr>
+            <a:r>
+              <a:rPr lang="en-US" sz="1400" dirty="0">
+                <a:solidFill>
+                  <a:srgbClr val="E5E2DC"/>
+                </a:solidFill>
+                <a:latin typeface="Calibri" pitchFamily="34" charset="0"/>
+                <a:ea typeface="Calibri" pitchFamily="34" charset="-122"/>
+                <a:cs typeface="Calibri" pitchFamily="34" charset="-120"/>
+              </a:rPr>
+              <a:t>How do the living and non-living parts interact?</a:t>
+            </a:r>
+            <a:endParaRPr lang="en-US" sz="1400" dirty="0"/>
           </a:p>
         </p:txBody>
       </p:sp>
@@ -1641,6 +2062,13 @@
 <file path=ppt/slides/slide3.xml><?xml version="1.0" encoding="utf-8"?>
 <p:sld xmlns:a="http://schemas.openxmlformats.org/drawingml/2006/main" xmlns:r="http://schemas.openxmlformats.org/officeDocument/2006/relationships" xmlns:p="http://schemas.openxmlformats.org/presentationml/2006/main">
   <p:cSld name="Slide 3">
+    <p:bg>
+      <p:bgPr>
+        <a:solidFill>
+          <a:srgbClr val="FAF8F5"/>
+        </a:solidFill>
+      </p:bgPr>
+    </p:bg>
     <p:spTree>
       <p:nvGrpSpPr>
         <p:cNvPr id="1" name=""/>
@@ -1664,13 +2092,13 @@
         <p:spPr>
           <a:xfrm>
             <a:off x="0" y="0"/>
-            <a:ext cx="9144000" cy="5143500"/>
+            <a:ext cx="9144000" cy="822960"/>
           </a:xfrm>
           <a:prstGeom prst="rect">
             <a:avLst/>
           </a:prstGeom>
           <a:solidFill>
-            <a:srgbClr val="FAF8F5"/>
+            <a:srgbClr val="FFFFFF"/>
           </a:solidFill>
           <a:ln/>
         </p:spPr>
@@ -1683,14 +2111,14 @@
         </p:nvSpPr>
         <p:spPr>
           <a:xfrm>
-            <a:off x="0" y="0"/>
-            <a:ext cx="9144000" cy="54864"/>
+            <a:off x="0" y="795528"/>
+            <a:ext cx="9144000" cy="27432"/>
           </a:xfrm>
           <a:prstGeom prst="rect">
             <a:avLst/>
           </a:prstGeom>
           <a:solidFill>
-            <a:srgbClr val="1B2A4A"/>
+            <a:srgbClr val="E9C46A"/>
           </a:solidFill>
           <a:ln/>
         </p:spPr>
@@ -1703,8 +2131,8 @@
         </p:nvSpPr>
         <p:spPr>
           <a:xfrm>
-            <a:off x="640080" y="320040"/>
-            <a:ext cx="7863840" cy="548640"/>
+            <a:off x="640080" y="91440"/>
+            <a:ext cx="7863840" cy="640080"/>
           </a:xfrm>
           <a:prstGeom prst="rect">
             <a:avLst/>
@@ -1720,7 +2148,7 @@
               <a:buNone/>
             </a:pPr>
             <a:r>
-              <a:rPr lang="en-US" sz="2600" b="1" dirty="0">
+              <a:rPr lang="en-US" sz="2200" b="1" dirty="0">
                 <a:solidFill>
                   <a:srgbClr val="1B2A4A"/>
                 </a:solidFill>
@@ -1728,51 +2156,22 @@
                 <a:ea typeface="Georgia" pitchFamily="34" charset="-122"/>
                 <a:cs typeface="Georgia" pitchFamily="34" charset="-120"/>
               </a:rPr>
-              <a:t>Biotic vs Abiotic</a:t>
-            </a:r>
-            <a:endParaRPr lang="en-US" sz="2600" dirty="0"/>
-          </a:p>
-        </p:txBody>
-      </p:sp>
-      <p:sp>
-        <p:nvSpPr>
-          <p:cNvPr id="5" name="Shape 3"/>
-          <p:cNvSpPr/>
-          <p:nvPr/>
-        </p:nvSpPr>
-        <p:spPr>
-          <a:xfrm>
-            <a:off x="640080" y="1097280"/>
-            <a:ext cx="3749040" cy="3474720"/>
-          </a:xfrm>
-          <a:prstGeom prst="roundRect">
-            <a:avLst>
-              <a:gd name="adj" fmla="val 2632"/>
-            </a:avLst>
-          </a:prstGeom>
-          <a:solidFill>
-            <a:srgbClr val="FFFFFF"/>
-          </a:solidFill>
-          <a:ln/>
-          <a:effectLst>
-            <a:outerShdw sx="100000" sy="100000" kx="0" ky="0" algn="bl" rotWithShape="0" blurRad="76200" dist="25400" dir="8100000">
-              <a:srgbClr val="000000">
-                <a:alpha val="8000"/>
-              </a:srgbClr>
-            </a:outerShdw>
-          </a:effectLst>
-        </p:spPr>
-      </p:sp>
-      <p:sp>
-        <p:nvSpPr>
-          <p:cNvPr id="6" name="Text 4"/>
-          <p:cNvSpPr/>
-          <p:nvPr/>
-        </p:nvSpPr>
-        <p:spPr>
-          <a:xfrm>
-            <a:off x="822960" y="1234440"/>
-            <a:ext cx="3383280" cy="365760"/>
+              <a:t>Ecosystem Basics</a:t>
+            </a:r>
+            <a:endParaRPr lang="en-US" sz="2200" dirty="0"/>
+          </a:p>
+        </p:txBody>
+      </p:sp>
+      <p:sp>
+        <p:nvSpPr>
+          <p:cNvPr id="5" name="Text 3"/>
+          <p:cNvSpPr/>
+          <p:nvPr/>
+        </p:nvSpPr>
+        <p:spPr>
+          <a:xfrm>
+            <a:off x="640080" y="1005840"/>
+            <a:ext cx="7863840" cy="2926080"/>
           </a:xfrm>
           <a:prstGeom prst="rect">
             <a:avLst/>
@@ -1784,54 +2183,15 @@
           <a:bodyPr wrap="square" rtlCol="0" anchor="ctr"/>
           <a:lstStyle/>
           <a:p>
-            <a:pPr indent="0" marL="0">
-              <a:buNone/>
-            </a:pPr>
-            <a:r>
-              <a:rPr lang="en-US" sz="1600" b="1" dirty="0">
-                <a:solidFill>
-                  <a:srgbClr val="1B2A4A"/>
-                </a:solidFill>
-                <a:latin typeface="Georgia" pitchFamily="34" charset="0"/>
-                <a:ea typeface="Georgia" pitchFamily="34" charset="-122"/>
-                <a:cs typeface="Georgia" pitchFamily="34" charset="-120"/>
-              </a:rPr>
-              <a:t>Biotic (Living)</a:t>
-            </a:r>
-            <a:endParaRPr lang="en-US" sz="1600" dirty="0"/>
-          </a:p>
-        </p:txBody>
-      </p:sp>
-      <p:sp>
-        <p:nvSpPr>
-          <p:cNvPr id="7" name="Text 5"/>
-          <p:cNvSpPr/>
-          <p:nvPr/>
-        </p:nvSpPr>
-        <p:spPr>
-          <a:xfrm>
-            <a:off x="822960" y="1691640"/>
-            <a:ext cx="3383280" cy="2743200"/>
-          </a:xfrm>
-          <a:prstGeom prst="rect">
-            <a:avLst/>
-          </a:prstGeom>
-          <a:noFill/>
-          <a:ln/>
-        </p:spPr>
-        <p:txBody>
-          <a:bodyPr wrap="square" rtlCol="0" anchor="t"/>
-          <a:lstStyle/>
-          <a:p>
             <a:pPr marL="342900" indent="-342900">
-              <a:lnSpc>
-                <a:spcPct val="135000"/>
-              </a:lnSpc>
+              <a:spcAft>
+                <a:spcPts val="800"/>
+              </a:spcAft>
               <a:buSzPct val="100000"/>
               <a:buChar char="•"/>
             </a:pPr>
             <a:r>
-              <a:rPr lang="en-US" sz="1300" dirty="0">
+              <a:rPr lang="en-US" sz="1600" dirty="0">
                 <a:solidFill>
                   <a:srgbClr val="3D3A36"/>
                 </a:solidFill>
@@ -1839,20 +2199,20 @@
                 <a:ea typeface="Calibri" pitchFamily="34" charset="-122"/>
                 <a:cs typeface="Calibri" pitchFamily="34" charset="-120"/>
               </a:rPr>
-              <a:t>Plants</a:t>
-            </a:r>
-            <a:endParaRPr lang="en-US" sz="1300" dirty="0"/>
+              <a:t>Ecosystem = living organisms AND non-living factors interacting.</a:t>
+            </a:r>
+            <a:endParaRPr lang="en-US" sz="1600" dirty="0"/>
           </a:p>
           <a:p>
             <a:pPr marL="342900" indent="-342900">
-              <a:lnSpc>
-                <a:spcPct val="135000"/>
-              </a:lnSpc>
+              <a:spcAft>
+                <a:spcPts val="800"/>
+              </a:spcAft>
               <a:buSzPct val="100000"/>
               <a:buChar char="•"/>
             </a:pPr>
             <a:r>
-              <a:rPr lang="en-US" sz="1300" dirty="0">
+              <a:rPr lang="en-US" sz="1600" dirty="0">
                 <a:solidFill>
                   <a:srgbClr val="3D3A36"/>
                 </a:solidFill>
@@ -1860,20 +2220,20 @@
                 <a:ea typeface="Calibri" pitchFamily="34" charset="-122"/>
                 <a:cs typeface="Calibri" pitchFamily="34" charset="-120"/>
               </a:rPr>
-              <a:t>Animals</a:t>
-            </a:r>
-            <a:endParaRPr lang="en-US" sz="1300" dirty="0"/>
+              <a:t>Can be any size — a pond, a forest, the entire ocean.</a:t>
+            </a:r>
+            <a:endParaRPr lang="en-US" sz="1600" dirty="0"/>
           </a:p>
           <a:p>
             <a:pPr marL="342900" indent="-342900">
-              <a:lnSpc>
-                <a:spcPct val="135000"/>
-              </a:lnSpc>
+              <a:spcAft>
+                <a:spcPts val="800"/>
+              </a:spcAft>
               <a:buSzPct val="100000"/>
               <a:buChar char="•"/>
             </a:pPr>
             <a:r>
-              <a:rPr lang="en-US" sz="1300" dirty="0">
+              <a:rPr lang="en-US" sz="1600" dirty="0">
                 <a:solidFill>
                   <a:srgbClr val="3D3A36"/>
                 </a:solidFill>
@@ -1881,20 +2241,20 @@
                 <a:ea typeface="Calibri" pitchFamily="34" charset="-122"/>
                 <a:cs typeface="Calibri" pitchFamily="34" charset="-120"/>
               </a:rPr>
-              <a:t>Fungi</a:t>
-            </a:r>
-            <a:endParaRPr lang="en-US" sz="1300" dirty="0"/>
+              <a:t>Living = biotic. Non-living = abiotic.</a:t>
+            </a:r>
+            <a:endParaRPr lang="en-US" sz="1600" dirty="0"/>
           </a:p>
           <a:p>
             <a:pPr marL="342900" indent="-342900">
-              <a:lnSpc>
-                <a:spcPct val="135000"/>
-              </a:lnSpc>
+              <a:spcAft>
+                <a:spcPts val="800"/>
+              </a:spcAft>
               <a:buSzPct val="100000"/>
               <a:buChar char="•"/>
             </a:pPr>
             <a:r>
-              <a:rPr lang="en-US" sz="1300" dirty="0">
+              <a:rPr lang="en-US" sz="1600" dirty="0">
                 <a:solidFill>
                   <a:srgbClr val="3D3A36"/>
                 </a:solidFill>
@@ -1902,36 +2262,34 @@
                 <a:ea typeface="Calibri" pitchFamily="34" charset="-122"/>
                 <a:cs typeface="Calibri" pitchFamily="34" charset="-120"/>
               </a:rPr>
-              <a:t>Bacteria</a:t>
-            </a:r>
-            <a:endParaRPr lang="en-US" sz="1300" dirty="0"/>
-          </a:p>
-        </p:txBody>
-      </p:sp>
-      <p:sp>
-        <p:nvSpPr>
-          <p:cNvPr id="8" name="Shape 6"/>
-          <p:cNvSpPr/>
-          <p:nvPr/>
-        </p:nvSpPr>
-        <p:spPr>
-          <a:xfrm>
-            <a:off x="4754880" y="1097280"/>
-            <a:ext cx="3749040" cy="3474720"/>
-          </a:xfrm>
-          <a:prstGeom prst="roundRect">
-            <a:avLst>
-              <a:gd name="adj" fmla="val 2632"/>
-            </a:avLst>
+              <a:t>The Yangtze River (长江) near Nanjing is a huge freshwater ecosystem.</a:t>
+            </a:r>
+            <a:endParaRPr lang="en-US" sz="1600" dirty="0"/>
+          </a:p>
+        </p:txBody>
+      </p:sp>
+      <p:sp>
+        <p:nvSpPr>
+          <p:cNvPr id="6" name="Shape 4"/>
+          <p:cNvSpPr/>
+          <p:nvPr/>
+        </p:nvSpPr>
+        <p:spPr>
+          <a:xfrm>
+            <a:off x="640080" y="4114800"/>
+            <a:ext cx="7863840" cy="731520"/>
+          </a:xfrm>
+          <a:prstGeom prst="rect">
+            <a:avLst/>
           </a:prstGeom>
           <a:solidFill>
-            <a:srgbClr val="FFFFFF"/>
+            <a:srgbClr val="E8F5F3"/>
           </a:solidFill>
           <a:ln/>
           <a:effectLst>
             <a:outerShdw sx="100000" sy="100000" kx="0" ky="0" algn="bl" rotWithShape="0" blurRad="76200" dist="25400" dir="8100000">
               <a:srgbClr val="000000">
-                <a:alpha val="8000"/>
+                <a:alpha val="12000"/>
               </a:srgbClr>
             </a:outerShdw>
           </a:effectLst>
@@ -1939,14 +2297,34 @@
       </p:sp>
       <p:sp>
         <p:nvSpPr>
-          <p:cNvPr id="9" name="Text 7"/>
-          <p:cNvSpPr/>
-          <p:nvPr/>
-        </p:nvSpPr>
-        <p:spPr>
-          <a:xfrm>
-            <a:off x="4937760" y="1234440"/>
-            <a:ext cx="3383280" cy="365760"/>
+          <p:cNvPr id="7" name="Shape 5"/>
+          <p:cNvSpPr/>
+          <p:nvPr/>
+        </p:nvSpPr>
+        <p:spPr>
+          <a:xfrm>
+            <a:off x="640080" y="4114800"/>
+            <a:ext cx="64008" cy="731520"/>
+          </a:xfrm>
+          <a:prstGeom prst="rect">
+            <a:avLst/>
+          </a:prstGeom>
+          <a:solidFill>
+            <a:srgbClr val="E9C46A"/>
+          </a:solidFill>
+          <a:ln/>
+        </p:spPr>
+      </p:sp>
+      <p:sp>
+        <p:nvSpPr>
+          <p:cNvPr id="8" name="Text 6"/>
+          <p:cNvSpPr/>
+          <p:nvPr/>
+        </p:nvSpPr>
+        <p:spPr>
+          <a:xfrm>
+            <a:off x="914400" y="4160520"/>
+            <a:ext cx="7406640" cy="640080"/>
           </a:xfrm>
           <a:prstGeom prst="rect">
             <a:avLst/>
@@ -1962,50 +2340,7 @@
               <a:buNone/>
             </a:pPr>
             <a:r>
-              <a:rPr lang="en-US" sz="1600" b="1" dirty="0">
-                <a:solidFill>
-                  <a:srgbClr val="1B2A4A"/>
-                </a:solidFill>
-                <a:latin typeface="Georgia" pitchFamily="34" charset="0"/>
-                <a:ea typeface="Georgia" pitchFamily="34" charset="-122"/>
-                <a:cs typeface="Georgia" pitchFamily="34" charset="-120"/>
-              </a:rPr>
-              <a:t>Abiotic (Non-Living)</a:t>
-            </a:r>
-            <a:endParaRPr lang="en-US" sz="1600" dirty="0"/>
-          </a:p>
-        </p:txBody>
-      </p:sp>
-      <p:sp>
-        <p:nvSpPr>
-          <p:cNvPr id="10" name="Text 8"/>
-          <p:cNvSpPr/>
-          <p:nvPr/>
-        </p:nvSpPr>
-        <p:spPr>
-          <a:xfrm>
-            <a:off x="4937760" y="1691640"/>
-            <a:ext cx="3383280" cy="2743200"/>
-          </a:xfrm>
-          <a:prstGeom prst="rect">
-            <a:avLst/>
-          </a:prstGeom>
-          <a:noFill/>
-          <a:ln/>
-        </p:spPr>
-        <p:txBody>
-          <a:bodyPr wrap="square" rtlCol="0" anchor="t"/>
-          <a:lstStyle/>
-          <a:p>
-            <a:pPr marL="342900" indent="-342900">
-              <a:lnSpc>
-                <a:spcPct val="135000"/>
-              </a:lnSpc>
-              <a:buSzPct val="100000"/>
-              <a:buChar char="•"/>
-            </a:pPr>
-            <a:r>
-              <a:rPr lang="en-US" sz="1300" dirty="0">
+              <a:rPr lang="en-US" sz="1300" i="1" dirty="0">
                 <a:solidFill>
                   <a:srgbClr val="3D3A36"/>
                 </a:solidFill>
@@ -2013,70 +2348,7 @@
                 <a:ea typeface="Calibri" pitchFamily="34" charset="-122"/>
                 <a:cs typeface="Calibri" pitchFamily="34" charset="-120"/>
               </a:rPr>
-              <a:t>Water</a:t>
-            </a:r>
-            <a:endParaRPr lang="en-US" sz="1300" dirty="0"/>
-          </a:p>
-          <a:p>
-            <a:pPr marL="342900" indent="-342900">
-              <a:lnSpc>
-                <a:spcPct val="135000"/>
-              </a:lnSpc>
-              <a:buSzPct val="100000"/>
-              <a:buChar char="•"/>
-            </a:pPr>
-            <a:r>
-              <a:rPr lang="en-US" sz="1300" dirty="0">
-                <a:solidFill>
-                  <a:srgbClr val="3D3A36"/>
-                </a:solidFill>
-                <a:latin typeface="Calibri" pitchFamily="34" charset="0"/>
-                <a:ea typeface="Calibri" pitchFamily="34" charset="-122"/>
-                <a:cs typeface="Calibri" pitchFamily="34" charset="-120"/>
-              </a:rPr>
-              <a:t>Sunlight</a:t>
-            </a:r>
-            <a:endParaRPr lang="en-US" sz="1300" dirty="0"/>
-          </a:p>
-          <a:p>
-            <a:pPr marL="342900" indent="-342900">
-              <a:lnSpc>
-                <a:spcPct val="135000"/>
-              </a:lnSpc>
-              <a:buSzPct val="100000"/>
-              <a:buChar char="•"/>
-            </a:pPr>
-            <a:r>
-              <a:rPr lang="en-US" sz="1300" dirty="0">
-                <a:solidFill>
-                  <a:srgbClr val="3D3A36"/>
-                </a:solidFill>
-                <a:latin typeface="Calibri" pitchFamily="34" charset="0"/>
-                <a:ea typeface="Calibri" pitchFamily="34" charset="-122"/>
-                <a:cs typeface="Calibri" pitchFamily="34" charset="-120"/>
-              </a:rPr>
-              <a:t>Temperature</a:t>
-            </a:r>
-            <a:endParaRPr lang="en-US" sz="1300" dirty="0"/>
-          </a:p>
-          <a:p>
-            <a:pPr marL="342900" indent="-342900">
-              <a:lnSpc>
-                <a:spcPct val="135000"/>
-              </a:lnSpc>
-              <a:buSzPct val="100000"/>
-              <a:buChar char="•"/>
-            </a:pPr>
-            <a:r>
-              <a:rPr lang="en-US" sz="1300" dirty="0">
-                <a:solidFill>
-                  <a:srgbClr val="3D3A36"/>
-                </a:solidFill>
-                <a:latin typeface="Calibri" pitchFamily="34" charset="0"/>
-                <a:ea typeface="Calibri" pitchFamily="34" charset="-122"/>
-                <a:cs typeface="Calibri" pitchFamily="34" charset="-120"/>
-              </a:rPr>
-              <a:t>Soil / minerals</a:t>
+              <a:t>Even the school garden at NIS is a small ecosystem.</a:t>
             </a:r>
             <a:endParaRPr lang="en-US" sz="1300" dirty="0"/>
           </a:p>
@@ -2093,6 +2365,13 @@
 <file path=ppt/slides/slide4.xml><?xml version="1.0" encoding="utf-8"?>
 <p:sld xmlns:a="http://schemas.openxmlformats.org/drawingml/2006/main" xmlns:r="http://schemas.openxmlformats.org/officeDocument/2006/relationships" xmlns:p="http://schemas.openxmlformats.org/presentationml/2006/main">
   <p:cSld name="Slide 4">
+    <p:bg>
+      <p:bgPr>
+        <a:solidFill>
+          <a:srgbClr val="FAF8F5"/>
+        </a:solidFill>
+      </p:bgPr>
+    </p:bg>
     <p:spTree>
       <p:nvGrpSpPr>
         <p:cNvPr id="1" name=""/>
@@ -2116,13 +2395,13 @@
         <p:spPr>
           <a:xfrm>
             <a:off x="0" y="0"/>
-            <a:ext cx="9144000" cy="5143500"/>
+            <a:ext cx="9144000" cy="822960"/>
           </a:xfrm>
           <a:prstGeom prst="rect">
             <a:avLst/>
           </a:prstGeom>
           <a:solidFill>
-            <a:srgbClr val="FAF8F5"/>
+            <a:srgbClr val="FFFFFF"/>
           </a:solidFill>
           <a:ln/>
         </p:spPr>
@@ -2135,14 +2414,14 @@
         </p:nvSpPr>
         <p:spPr>
           <a:xfrm>
-            <a:off x="0" y="0"/>
-            <a:ext cx="9144000" cy="54864"/>
+            <a:off x="0" y="795528"/>
+            <a:ext cx="9144000" cy="27432"/>
           </a:xfrm>
           <a:prstGeom prst="rect">
             <a:avLst/>
           </a:prstGeom>
           <a:solidFill>
-            <a:srgbClr val="1B2A4A"/>
+            <a:srgbClr val="E9C46A"/>
           </a:solidFill>
           <a:ln/>
         </p:spPr>
@@ -2155,8 +2434,8 @@
         </p:nvSpPr>
         <p:spPr>
           <a:xfrm>
-            <a:off x="640080" y="320040"/>
-            <a:ext cx="7863840" cy="548640"/>
+            <a:off x="640080" y="91440"/>
+            <a:ext cx="7863840" cy="640080"/>
           </a:xfrm>
           <a:prstGeom prst="rect">
             <a:avLst/>
@@ -2172,7 +2451,7 @@
               <a:buNone/>
             </a:pPr>
             <a:r>
-              <a:rPr lang="en-US" sz="2600" b="1" dirty="0">
+              <a:rPr lang="en-US" sz="2200" b="1" dirty="0">
                 <a:solidFill>
                   <a:srgbClr val="1B2A4A"/>
                 </a:solidFill>
@@ -2180,9 +2459,9 @@
                 <a:ea typeface="Georgia" pitchFamily="34" charset="-122"/>
                 <a:cs typeface="Georgia" pitchFamily="34" charset="-120"/>
               </a:rPr>
-              <a:t>Key Terms</a:t>
-            </a:r>
-            <a:endParaRPr lang="en-US" sz="2600" dirty="0"/>
+              <a:t>Key Vocabulary</a:t>
+            </a:r>
+            <a:endParaRPr lang="en-US" sz="2200" dirty="0"/>
           </a:p>
         </p:txBody>
       </p:sp>
@@ -2201,7 +2480,7 @@
           </p:nvPr>
         </p:nvGraphicFramePr>
         <p:xfrm>
-          <a:off x="640080" y="1051560"/>
+          <a:off x="640080" y="1005840"/>
           <a:ext cx="7863840" cy="914400"/>
         </p:xfrm>
         <a:graphic>
@@ -2209,10 +2488,10 @@
             <a:tbl>
               <a:tblPr/>
               <a:tblGrid>
-                <a:gridCol w="2560320"/>
-                <a:gridCol w="5303520"/>
+                <a:gridCol w="2286000"/>
+                <a:gridCol w="5577840"/>
               </a:tblGrid>
-              <a:tr h="594360">
+              <a:tr h="457200">
                 <a:tc>
                   <a:txBody>
                     <a:bodyPr/>
@@ -2277,7 +2556,7 @@
                       <a:tailEnd type="none" w="med" len="med"/>
                     </a:lnB>
                     <a:solidFill>
-                      <a:srgbClr val="1B2A4A"/>
+                      <a:srgbClr val="E9C46A"/>
                     </a:solidFill>
                   </a:tcPr>
                 </a:tc>
@@ -2345,12 +2624,12 @@
                       <a:tailEnd type="none" w="med" len="med"/>
                     </a:lnB>
                     <a:solidFill>
-                      <a:srgbClr val="1B2A4A"/>
+                      <a:srgbClr val="E9C46A"/>
                     </a:solidFill>
                   </a:tcPr>
                 </a:tc>
               </a:tr>
-              <a:tr h="594360">
+              <a:tr h="457200">
                 <a:tc>
                   <a:txBody>
                     <a:bodyPr/>
@@ -2360,7 +2639,7 @@
                         <a:buNone/>
                       </a:pPr>
                       <a:r>
-                        <a:rPr lang="en-US" sz="1300" b="1" dirty="0">
+                        <a:rPr lang="en-US" sz="1400" b="1" dirty="0">
                           <a:solidFill>
                             <a:srgbClr val="1B2A4A"/>
                           </a:solidFill>
@@ -2370,7 +2649,7 @@
                         </a:rPr>
                         <a:t>Ecosystem</a:t>
                       </a:r>
-                      <a:endParaRPr lang="en-US" sz="1300" dirty="0">
+                      <a:endParaRPr lang="en-US" sz="1400" dirty="0">
                         <a:latin typeface="Calibri" charset="0"/>
                         <a:ea typeface="Calibri" charset="0"/>
                         <a:cs typeface="Calibri" charset="0"/>
@@ -2425,7 +2704,7 @@
                         <a:buNone/>
                       </a:pPr>
                       <a:r>
-                        <a:rPr lang="en-US" sz="1300" dirty="0">
+                        <a:rPr lang="en-US" sz="1400" dirty="0">
                           <a:solidFill>
                             <a:srgbClr val="3D3A36"/>
                           </a:solidFill>
@@ -2433,9 +2712,9 @@
                           <a:ea typeface="Calibri" pitchFamily="34" charset="-122"/>
                           <a:cs typeface="Calibri" pitchFamily="34" charset="-120"/>
                         </a:rPr>
-                        <a:t>Community of organisms + their environment</a:t>
+                        <a:t>Community of living things + their environment.</a:t>
                       </a:r>
-                      <a:endParaRPr lang="en-US" sz="1300" dirty="0">
+                      <a:endParaRPr lang="en-US" sz="1400" dirty="0">
                         <a:latin typeface="Calibri" charset="0"/>
                         <a:ea typeface="Calibri" charset="0"/>
                         <a:cs typeface="Calibri" charset="0"/>
@@ -2482,7 +2761,7 @@
                   </a:tcPr>
                 </a:tc>
               </a:tr>
-              <a:tr h="594360">
+              <a:tr h="457200">
                 <a:tc>
                   <a:txBody>
                     <a:bodyPr/>
@@ -2492,7 +2771,7 @@
                         <a:buNone/>
                       </a:pPr>
                       <a:r>
-                        <a:rPr lang="en-US" sz="1300" b="1" dirty="0">
+                        <a:rPr lang="en-US" sz="1400" b="1" dirty="0">
                           <a:solidFill>
                             <a:srgbClr val="1B2A4A"/>
                           </a:solidFill>
@@ -2502,7 +2781,7 @@
                         </a:rPr>
                         <a:t>Biotic</a:t>
                       </a:r>
-                      <a:endParaRPr lang="en-US" sz="1300" dirty="0">
+                      <a:endParaRPr lang="en-US" sz="1400" dirty="0">
                         <a:latin typeface="Calibri" charset="0"/>
                         <a:ea typeface="Calibri" charset="0"/>
                         <a:cs typeface="Calibri" charset="0"/>
@@ -2557,7 +2836,7 @@
                         <a:buNone/>
                       </a:pPr>
                       <a:r>
-                        <a:rPr lang="en-US" sz="1300" dirty="0">
+                        <a:rPr lang="en-US" sz="1400" dirty="0">
                           <a:solidFill>
                             <a:srgbClr val="3D3A36"/>
                           </a:solidFill>
@@ -2565,9 +2844,9 @@
                           <a:ea typeface="Calibri" pitchFamily="34" charset="-122"/>
                           <a:cs typeface="Calibri" pitchFamily="34" charset="-120"/>
                         </a:rPr>
-                        <a:t>Living components</a:t>
+                        <a:t>Living factors (plants, animals, fungi, bacteria).</a:t>
                       </a:r>
-                      <a:endParaRPr lang="en-US" sz="1300" dirty="0">
+                      <a:endParaRPr lang="en-US" sz="1400" dirty="0">
                         <a:latin typeface="Calibri" charset="0"/>
                         <a:ea typeface="Calibri" charset="0"/>
                         <a:cs typeface="Calibri" charset="0"/>
@@ -2614,7 +2893,7 @@
                   </a:tcPr>
                 </a:tc>
               </a:tr>
-              <a:tr h="594360">
+              <a:tr h="457200">
                 <a:tc>
                   <a:txBody>
                     <a:bodyPr/>
@@ -2624,7 +2903,7 @@
                         <a:buNone/>
                       </a:pPr>
                       <a:r>
-                        <a:rPr lang="en-US" sz="1300" b="1" dirty="0">
+                        <a:rPr lang="en-US" sz="1400" b="1" dirty="0">
                           <a:solidFill>
                             <a:srgbClr val="1B2A4A"/>
                           </a:solidFill>
@@ -2634,7 +2913,7 @@
                         </a:rPr>
                         <a:t>Abiotic</a:t>
                       </a:r>
-                      <a:endParaRPr lang="en-US" sz="1300" dirty="0">
+                      <a:endParaRPr lang="en-US" sz="1400" dirty="0">
                         <a:latin typeface="Calibri" charset="0"/>
                         <a:ea typeface="Calibri" charset="0"/>
                         <a:cs typeface="Calibri" charset="0"/>
@@ -2689,7 +2968,7 @@
                         <a:buNone/>
                       </a:pPr>
                       <a:r>
-                        <a:rPr lang="en-US" sz="1300" dirty="0">
+                        <a:rPr lang="en-US" sz="1400" dirty="0">
                           <a:solidFill>
                             <a:srgbClr val="3D3A36"/>
                           </a:solidFill>
@@ -2697,9 +2976,9 @@
                           <a:ea typeface="Calibri" pitchFamily="34" charset="-122"/>
                           <a:cs typeface="Calibri" pitchFamily="34" charset="-120"/>
                         </a:rPr>
-                        <a:t>Non-living components</a:t>
+                        <a:t>Non-living factors (temperature, water, light, soil).</a:t>
                       </a:r>
-                      <a:endParaRPr lang="en-US" sz="1300" dirty="0">
+                      <a:endParaRPr lang="en-US" sz="1400" dirty="0">
                         <a:latin typeface="Calibri" charset="0"/>
                         <a:ea typeface="Calibri" charset="0"/>
                         <a:cs typeface="Calibri" charset="0"/>
@@ -2746,7 +3025,7 @@
                   </a:tcPr>
                 </a:tc>
               </a:tr>
-              <a:tr h="594360">
+              <a:tr h="457200">
                 <a:tc>
                   <a:txBody>
                     <a:bodyPr/>
@@ -2756,7 +3035,7 @@
                         <a:buNone/>
                       </a:pPr>
                       <a:r>
-                        <a:rPr lang="en-US" sz="1300" b="1" dirty="0">
+                        <a:rPr lang="en-US" sz="1400" b="1" dirty="0">
                           <a:solidFill>
                             <a:srgbClr val="1B2A4A"/>
                           </a:solidFill>
@@ -2766,7 +3045,7 @@
                         </a:rPr>
                         <a:t>Habitat</a:t>
                       </a:r>
-                      <a:endParaRPr lang="en-US" sz="1300" dirty="0">
+                      <a:endParaRPr lang="en-US" sz="1400" dirty="0">
                         <a:latin typeface="Calibri" charset="0"/>
                         <a:ea typeface="Calibri" charset="0"/>
                         <a:cs typeface="Calibri" charset="0"/>
@@ -2821,7 +3100,7 @@
                         <a:buNone/>
                       </a:pPr>
                       <a:r>
-                        <a:rPr lang="en-US" sz="1300" dirty="0">
+                        <a:rPr lang="en-US" sz="1400" dirty="0">
                           <a:solidFill>
                             <a:srgbClr val="3D3A36"/>
                           </a:solidFill>
@@ -2829,9 +3108,9 @@
                           <a:ea typeface="Calibri" pitchFamily="34" charset="-122"/>
                           <a:cs typeface="Calibri" pitchFamily="34" charset="-120"/>
                         </a:rPr>
-                        <a:t>The place where an organism lives</a:t>
+                        <a:t>The place where an organism lives.</a:t>
                       </a:r>
-                      <a:endParaRPr lang="en-US" sz="1300" dirty="0">
+                      <a:endParaRPr lang="en-US" sz="1400" dirty="0">
                         <a:latin typeface="Calibri" charset="0"/>
                         <a:ea typeface="Calibri" charset="0"/>
                         <a:cs typeface="Calibri" charset="0"/>
@@ -2878,7 +3157,7 @@
                   </a:tcPr>
                 </a:tc>
               </a:tr>
-              <a:tr h="594360">
+              <a:tr h="457200">
                 <a:tc>
                   <a:txBody>
                     <a:bodyPr/>
@@ -2888,7 +3167,7 @@
                         <a:buNone/>
                       </a:pPr>
                       <a:r>
-                        <a:rPr lang="en-US" sz="1300" b="1" dirty="0">
+                        <a:rPr lang="en-US" sz="1400" b="1" dirty="0">
                           <a:solidFill>
                             <a:srgbClr val="1B2A4A"/>
                           </a:solidFill>
@@ -2896,9 +3175,9 @@
                           <a:ea typeface="Calibri" pitchFamily="34" charset="-122"/>
                           <a:cs typeface="Calibri" pitchFamily="34" charset="-120"/>
                         </a:rPr>
-                        <a:t>Niche</a:t>
+                        <a:t>Population</a:t>
                       </a:r>
-                      <a:endParaRPr lang="en-US" sz="1300" dirty="0">
+                      <a:endParaRPr lang="en-US" sz="1400" dirty="0">
                         <a:latin typeface="Calibri" charset="0"/>
                         <a:ea typeface="Calibri" charset="0"/>
                         <a:cs typeface="Calibri" charset="0"/>
@@ -2953,7 +3232,7 @@
                         <a:buNone/>
                       </a:pPr>
                       <a:r>
-                        <a:rPr lang="en-US" sz="1300" dirty="0">
+                        <a:rPr lang="en-US" sz="1400" dirty="0">
                           <a:solidFill>
                             <a:srgbClr val="3D3A36"/>
                           </a:solidFill>
@@ -2961,9 +3240,141 @@
                           <a:ea typeface="Calibri" pitchFamily="34" charset="-122"/>
                           <a:cs typeface="Calibri" pitchFamily="34" charset="-120"/>
                         </a:rPr>
-                        <a:t>The role an organism plays in its ecosystem</a:t>
+                        <a:t>All of ONE species in an area.</a:t>
                       </a:r>
-                      <a:endParaRPr lang="en-US" sz="1300" dirty="0">
+                      <a:endParaRPr lang="en-US" sz="1400" dirty="0">
+                        <a:latin typeface="Calibri" charset="0"/>
+                        <a:ea typeface="Calibri" charset="0"/>
+                        <a:cs typeface="Calibri" charset="0"/>
+                      </a:endParaRPr>
+                    </a:p>
+                  </a:txBody>
+                  <a:tcPr marL="91440" marR="91440" marT="45720" marB="45720">
+                    <a:lnL w="6350" cap="flat" cmpd="sng" algn="ctr">
+                      <a:solidFill>
+                        <a:srgbClr val="E5E2DC"/>
+                      </a:solidFill>
+                      <a:prstDash val="solid"/>
+                      <a:round/>
+                      <a:headEnd type="none" w="med" len="med"/>
+                      <a:tailEnd type="none" w="med" len="med"/>
+                    </a:lnL>
+                    <a:lnR w="6350" cap="flat" cmpd="sng" algn="ctr">
+                      <a:solidFill>
+                        <a:srgbClr val="E5E2DC"/>
+                      </a:solidFill>
+                      <a:prstDash val="solid"/>
+                      <a:round/>
+                      <a:headEnd type="none" w="med" len="med"/>
+                      <a:tailEnd type="none" w="med" len="med"/>
+                    </a:lnR>
+                    <a:lnT w="6350" cap="flat" cmpd="sng" algn="ctr">
+                      <a:solidFill>
+                        <a:srgbClr val="E5E2DC"/>
+                      </a:solidFill>
+                      <a:prstDash val="solid"/>
+                      <a:round/>
+                      <a:headEnd type="none" w="med" len="med"/>
+                      <a:tailEnd type="none" w="med" len="med"/>
+                    </a:lnT>
+                    <a:lnB w="6350" cap="flat" cmpd="sng" algn="ctr">
+                      <a:solidFill>
+                        <a:srgbClr val="E5E2DC"/>
+                      </a:solidFill>
+                      <a:prstDash val="solid"/>
+                      <a:round/>
+                      <a:headEnd type="none" w="med" len="med"/>
+                      <a:tailEnd type="none" w="med" len="med"/>
+                    </a:lnB>
+                  </a:tcPr>
+                </a:tc>
+              </a:tr>
+              <a:tr h="457200">
+                <a:tc>
+                  <a:txBody>
+                    <a:bodyPr/>
+                    <a:lstStyle/>
+                    <a:p>
+                      <a:pPr indent="0" marL="0">
+                        <a:buNone/>
+                      </a:pPr>
+                      <a:r>
+                        <a:rPr lang="en-US" sz="1400" b="1" dirty="0">
+                          <a:solidFill>
+                            <a:srgbClr val="1B2A4A"/>
+                          </a:solidFill>
+                          <a:latin typeface="Calibri" pitchFamily="34" charset="0"/>
+                          <a:ea typeface="Calibri" pitchFamily="34" charset="-122"/>
+                          <a:cs typeface="Calibri" pitchFamily="34" charset="-120"/>
+                        </a:rPr>
+                        <a:t>Community</a:t>
+                      </a:r>
+                      <a:endParaRPr lang="en-US" sz="1400" dirty="0">
+                        <a:latin typeface="Calibri" charset="0"/>
+                        <a:ea typeface="Calibri" charset="0"/>
+                        <a:cs typeface="Calibri" charset="0"/>
+                      </a:endParaRPr>
+                    </a:p>
+                  </a:txBody>
+                  <a:tcPr marL="91440" marR="91440" marT="45720" marB="45720">
+                    <a:lnL w="6350" cap="flat" cmpd="sng" algn="ctr">
+                      <a:solidFill>
+                        <a:srgbClr val="E5E2DC"/>
+                      </a:solidFill>
+                      <a:prstDash val="solid"/>
+                      <a:round/>
+                      <a:headEnd type="none" w="med" len="med"/>
+                      <a:tailEnd type="none" w="med" len="med"/>
+                    </a:lnL>
+                    <a:lnR w="6350" cap="flat" cmpd="sng" algn="ctr">
+                      <a:solidFill>
+                        <a:srgbClr val="E5E2DC"/>
+                      </a:solidFill>
+                      <a:prstDash val="solid"/>
+                      <a:round/>
+                      <a:headEnd type="none" w="med" len="med"/>
+                      <a:tailEnd type="none" w="med" len="med"/>
+                    </a:lnR>
+                    <a:lnT w="6350" cap="flat" cmpd="sng" algn="ctr">
+                      <a:solidFill>
+                        <a:srgbClr val="E5E2DC"/>
+                      </a:solidFill>
+                      <a:prstDash val="solid"/>
+                      <a:round/>
+                      <a:headEnd type="none" w="med" len="med"/>
+                      <a:tailEnd type="none" w="med" len="med"/>
+                    </a:lnT>
+                    <a:lnB w="6350" cap="flat" cmpd="sng" algn="ctr">
+                      <a:solidFill>
+                        <a:srgbClr val="E5E2DC"/>
+                      </a:solidFill>
+                      <a:prstDash val="solid"/>
+                      <a:round/>
+                      <a:headEnd type="none" w="med" len="med"/>
+                      <a:tailEnd type="none" w="med" len="med"/>
+                    </a:lnB>
+                  </a:tcPr>
+                </a:tc>
+                <a:tc>
+                  <a:txBody>
+                    <a:bodyPr/>
+                    <a:lstStyle/>
+                    <a:p>
+                      <a:pPr indent="0" marL="0">
+                        <a:buNone/>
+                      </a:pPr>
+                      <a:r>
+                        <a:rPr lang="en-US" sz="1400" dirty="0">
+                          <a:solidFill>
+                            <a:srgbClr val="3D3A36"/>
+                          </a:solidFill>
+                          <a:latin typeface="Calibri" pitchFamily="34" charset="0"/>
+                          <a:ea typeface="Calibri" pitchFamily="34" charset="-122"/>
+                          <a:cs typeface="Calibri" pitchFamily="34" charset="-120"/>
+                        </a:rPr>
+                        <a:t>All populations of DIFFERENT species in an area.</a:t>
+                      </a:r>
+                      <a:endParaRPr lang="en-US" sz="1400" dirty="0">
                         <a:latin typeface="Calibri" charset="0"/>
                         <a:ea typeface="Calibri" charset="0"/>
                         <a:cs typeface="Calibri" charset="0"/>
@@ -3025,6 +3436,13 @@
 <file path=ppt/slides/slide5.xml><?xml version="1.0" encoding="utf-8"?>
 <p:sld xmlns:a="http://schemas.openxmlformats.org/drawingml/2006/main" xmlns:r="http://schemas.openxmlformats.org/officeDocument/2006/relationships" xmlns:p="http://schemas.openxmlformats.org/presentationml/2006/main">
   <p:cSld name="Slide 5">
+    <p:bg>
+      <p:bgPr>
+        <a:solidFill>
+          <a:srgbClr val="FAF8F5"/>
+        </a:solidFill>
+      </p:bgPr>
+    </p:bg>
     <p:spTree>
       <p:nvGrpSpPr>
         <p:cNvPr id="1" name=""/>
@@ -3048,6 +3466,1353 @@
         <p:spPr>
           <a:xfrm>
             <a:off x="0" y="0"/>
+            <a:ext cx="9144000" cy="822960"/>
+          </a:xfrm>
+          <a:prstGeom prst="rect">
+            <a:avLst/>
+          </a:prstGeom>
+          <a:solidFill>
+            <a:srgbClr val="FFFFFF"/>
+          </a:solidFill>
+          <a:ln/>
+        </p:spPr>
+      </p:sp>
+      <p:sp>
+        <p:nvSpPr>
+          <p:cNvPr id="3" name="Shape 1"/>
+          <p:cNvSpPr/>
+          <p:nvPr/>
+        </p:nvSpPr>
+        <p:spPr>
+          <a:xfrm>
+            <a:off x="0" y="795528"/>
+            <a:ext cx="9144000" cy="27432"/>
+          </a:xfrm>
+          <a:prstGeom prst="rect">
+            <a:avLst/>
+          </a:prstGeom>
+          <a:solidFill>
+            <a:srgbClr val="E9C46A"/>
+          </a:solidFill>
+          <a:ln/>
+        </p:spPr>
+      </p:sp>
+      <p:sp>
+        <p:nvSpPr>
+          <p:cNvPr id="4" name="Text 2"/>
+          <p:cNvSpPr/>
+          <p:nvPr/>
+        </p:nvSpPr>
+        <p:spPr>
+          <a:xfrm>
+            <a:off x="640080" y="91440"/>
+            <a:ext cx="7863840" cy="640080"/>
+          </a:xfrm>
+          <a:prstGeom prst="rect">
+            <a:avLst/>
+          </a:prstGeom>
+          <a:noFill/>
+          <a:ln/>
+        </p:spPr>
+        <p:txBody>
+          <a:bodyPr wrap="square" lIns="0" tIns="0" rIns="0" bIns="0" rtlCol="0" anchor="ctr"/>
+          <a:lstStyle/>
+          <a:p>
+            <a:pPr indent="0" marL="0">
+              <a:buNone/>
+            </a:pPr>
+            <a:r>
+              <a:rPr lang="en-US" sz="2200" b="1" dirty="0">
+                <a:solidFill>
+                  <a:srgbClr val="1B2A4A"/>
+                </a:solidFill>
+                <a:latin typeface="Georgia" pitchFamily="34" charset="0"/>
+                <a:ea typeface="Georgia" pitchFamily="34" charset="-122"/>
+                <a:cs typeface="Georgia" pitchFamily="34" charset="-120"/>
+              </a:rPr>
+              <a:t>Biotic vs. Abiotic</a:t>
+            </a:r>
+            <a:endParaRPr lang="en-US" sz="2200" dirty="0"/>
+          </a:p>
+        </p:txBody>
+      </p:sp>
+      <p:sp>
+        <p:nvSpPr>
+          <p:cNvPr id="5" name="Shape 3"/>
+          <p:cNvSpPr/>
+          <p:nvPr/>
+        </p:nvSpPr>
+        <p:spPr>
+          <a:xfrm>
+            <a:off x="457200" y="1005840"/>
+            <a:ext cx="3931920" cy="3657600"/>
+          </a:xfrm>
+          <a:prstGeom prst="rect">
+            <a:avLst/>
+          </a:prstGeom>
+          <a:solidFill>
+            <a:srgbClr val="FFFFFF"/>
+          </a:solidFill>
+          <a:ln/>
+          <a:effectLst>
+            <a:outerShdw sx="100000" sy="100000" kx="0" ky="0" algn="bl" rotWithShape="0" blurRad="76200" dist="25400" dir="8100000">
+              <a:srgbClr val="000000">
+                <a:alpha val="12000"/>
+              </a:srgbClr>
+            </a:outerShdw>
+          </a:effectLst>
+        </p:spPr>
+      </p:sp>
+      <p:sp>
+        <p:nvSpPr>
+          <p:cNvPr id="6" name="Shape 4"/>
+          <p:cNvSpPr/>
+          <p:nvPr/>
+        </p:nvSpPr>
+        <p:spPr>
+          <a:xfrm>
+            <a:off x="457200" y="1005840"/>
+            <a:ext cx="3931920" cy="64008"/>
+          </a:xfrm>
+          <a:prstGeom prst="rect">
+            <a:avLst/>
+          </a:prstGeom>
+          <a:solidFill>
+            <a:srgbClr val="E9C46A"/>
+          </a:solidFill>
+          <a:ln/>
+        </p:spPr>
+      </p:sp>
+      <p:sp>
+        <p:nvSpPr>
+          <p:cNvPr id="7" name="Text 5"/>
+          <p:cNvSpPr/>
+          <p:nvPr/>
+        </p:nvSpPr>
+        <p:spPr>
+          <a:xfrm>
+            <a:off x="640080" y="1188720"/>
+            <a:ext cx="3566160" cy="457200"/>
+          </a:xfrm>
+          <a:prstGeom prst="rect">
+            <a:avLst/>
+          </a:prstGeom>
+          <a:noFill/>
+          <a:ln/>
+        </p:spPr>
+        <p:txBody>
+          <a:bodyPr wrap="square" rtlCol="0" anchor="ctr"/>
+          <a:lstStyle/>
+          <a:p>
+            <a:pPr indent="0" marL="0">
+              <a:buNone/>
+            </a:pPr>
+            <a:r>
+              <a:rPr lang="en-US" sz="1600" b="1" dirty="0">
+                <a:solidFill>
+                  <a:srgbClr val="E9C46A"/>
+                </a:solidFill>
+                <a:latin typeface="Calibri" pitchFamily="34" charset="0"/>
+                <a:ea typeface="Calibri" pitchFamily="34" charset="-122"/>
+                <a:cs typeface="Calibri" pitchFamily="34" charset="-120"/>
+              </a:rPr>
+              <a:t>Biotic in Xuanwu Lake</a:t>
+            </a:r>
+            <a:endParaRPr lang="en-US" sz="1600" dirty="0"/>
+          </a:p>
+        </p:txBody>
+      </p:sp>
+      <p:sp>
+        <p:nvSpPr>
+          <p:cNvPr id="8" name="Text 6"/>
+          <p:cNvSpPr/>
+          <p:nvPr/>
+        </p:nvSpPr>
+        <p:spPr>
+          <a:xfrm>
+            <a:off x="640080" y="1691640"/>
+            <a:ext cx="3566160" cy="2743200"/>
+          </a:xfrm>
+          <a:prstGeom prst="rect">
+            <a:avLst/>
+          </a:prstGeom>
+          <a:noFill/>
+          <a:ln/>
+        </p:spPr>
+        <p:txBody>
+          <a:bodyPr wrap="square" rtlCol="0" anchor="ctr"/>
+          <a:lstStyle/>
+          <a:p>
+            <a:pPr marL="342900" indent="-342900">
+              <a:spcAft>
+                <a:spcPts val="600"/>
+              </a:spcAft>
+              <a:buSzPct val="100000"/>
+              <a:buChar char="•"/>
+            </a:pPr>
+            <a:r>
+              <a:rPr lang="en-US" sz="1400" dirty="0">
+                <a:solidFill>
+                  <a:srgbClr val="3D3A36"/>
+                </a:solidFill>
+                <a:latin typeface="Calibri" pitchFamily="34" charset="0"/>
+                <a:ea typeface="Calibri" pitchFamily="34" charset="-122"/>
+                <a:cs typeface="Calibri" pitchFamily="34" charset="-120"/>
+              </a:rPr>
+              <a:t>Fish, lotus plants (荷花), algae.</a:t>
+            </a:r>
+            <a:endParaRPr lang="en-US" sz="1400" dirty="0"/>
+          </a:p>
+          <a:p>
+            <a:pPr marL="342900" indent="-342900">
+              <a:spcAft>
+                <a:spcPts val="600"/>
+              </a:spcAft>
+              <a:buSzPct val="100000"/>
+              <a:buChar char="•"/>
+            </a:pPr>
+            <a:r>
+              <a:rPr lang="en-US" sz="1400" dirty="0">
+                <a:solidFill>
+                  <a:srgbClr val="3D3A36"/>
+                </a:solidFill>
+                <a:latin typeface="Calibri" pitchFamily="34" charset="0"/>
+                <a:ea typeface="Calibri" pitchFamily="34" charset="-122"/>
+                <a:cs typeface="Calibri" pitchFamily="34" charset="-120"/>
+              </a:rPr>
+              <a:t>Water birds, insects, bacteria.</a:t>
+            </a:r>
+            <a:endParaRPr lang="en-US" sz="1400" dirty="0"/>
+          </a:p>
+          <a:p>
+            <a:pPr marL="342900" indent="-342900">
+              <a:spcAft>
+                <a:spcPts val="600"/>
+              </a:spcAft>
+              <a:buSzPct val="100000"/>
+              <a:buChar char="•"/>
+            </a:pPr>
+            <a:r>
+              <a:rPr lang="en-US" sz="1400" dirty="0">
+                <a:solidFill>
+                  <a:srgbClr val="3D3A36"/>
+                </a:solidFill>
+                <a:latin typeface="Calibri" pitchFamily="34" charset="0"/>
+                <a:ea typeface="Calibri" pitchFamily="34" charset="-122"/>
+                <a:cs typeface="Calibri" pitchFamily="34" charset="-120"/>
+              </a:rPr>
+              <a:t>Competition for food and light.</a:t>
+            </a:r>
+            <a:endParaRPr lang="en-US" sz="1400" dirty="0"/>
+          </a:p>
+          <a:p>
+            <a:pPr marL="342900" indent="-342900">
+              <a:spcAft>
+                <a:spcPts val="600"/>
+              </a:spcAft>
+              <a:buSzPct val="100000"/>
+              <a:buChar char="•"/>
+            </a:pPr>
+            <a:r>
+              <a:rPr lang="en-US" sz="1400" dirty="0">
+                <a:solidFill>
+                  <a:srgbClr val="3D3A36"/>
+                </a:solidFill>
+                <a:latin typeface="Calibri" pitchFamily="34" charset="0"/>
+                <a:ea typeface="Calibri" pitchFamily="34" charset="-122"/>
+                <a:cs typeface="Calibri" pitchFamily="34" charset="-120"/>
+              </a:rPr>
+              <a:t>Predator-prey relationships.</a:t>
+            </a:r>
+            <a:endParaRPr lang="en-US" sz="1400" dirty="0"/>
+          </a:p>
+        </p:txBody>
+      </p:sp>
+      <p:sp>
+        <p:nvSpPr>
+          <p:cNvPr id="9" name="Shape 7"/>
+          <p:cNvSpPr/>
+          <p:nvPr/>
+        </p:nvSpPr>
+        <p:spPr>
+          <a:xfrm>
+            <a:off x="4754880" y="1005840"/>
+            <a:ext cx="3931920" cy="3657600"/>
+          </a:xfrm>
+          <a:prstGeom prst="rect">
+            <a:avLst/>
+          </a:prstGeom>
+          <a:solidFill>
+            <a:srgbClr val="FFFFFF"/>
+          </a:solidFill>
+          <a:ln/>
+          <a:effectLst>
+            <a:outerShdw sx="100000" sy="100000" kx="0" ky="0" algn="bl" rotWithShape="0" blurRad="76200" dist="25400" dir="8100000">
+              <a:srgbClr val="000000">
+                <a:alpha val="12000"/>
+              </a:srgbClr>
+            </a:outerShdw>
+          </a:effectLst>
+        </p:spPr>
+      </p:sp>
+      <p:sp>
+        <p:nvSpPr>
+          <p:cNvPr id="10" name="Shape 8"/>
+          <p:cNvSpPr/>
+          <p:nvPr/>
+        </p:nvSpPr>
+        <p:spPr>
+          <a:xfrm>
+            <a:off x="4754880" y="1005840"/>
+            <a:ext cx="3931920" cy="64008"/>
+          </a:xfrm>
+          <a:prstGeom prst="rect">
+            <a:avLst/>
+          </a:prstGeom>
+          <a:solidFill>
+            <a:srgbClr val="E9C46A"/>
+          </a:solidFill>
+          <a:ln/>
+        </p:spPr>
+      </p:sp>
+      <p:sp>
+        <p:nvSpPr>
+          <p:cNvPr id="11" name="Text 9"/>
+          <p:cNvSpPr/>
+          <p:nvPr/>
+        </p:nvSpPr>
+        <p:spPr>
+          <a:xfrm>
+            <a:off x="4937760" y="1188720"/>
+            <a:ext cx="3566160" cy="457200"/>
+          </a:xfrm>
+          <a:prstGeom prst="rect">
+            <a:avLst/>
+          </a:prstGeom>
+          <a:noFill/>
+          <a:ln/>
+        </p:spPr>
+        <p:txBody>
+          <a:bodyPr wrap="square" rtlCol="0" anchor="ctr"/>
+          <a:lstStyle/>
+          <a:p>
+            <a:pPr indent="0" marL="0">
+              <a:buNone/>
+            </a:pPr>
+            <a:r>
+              <a:rPr lang="en-US" sz="1600" b="1" dirty="0">
+                <a:solidFill>
+                  <a:srgbClr val="E9C46A"/>
+                </a:solidFill>
+                <a:latin typeface="Calibri" pitchFamily="34" charset="0"/>
+                <a:ea typeface="Calibri" pitchFamily="34" charset="-122"/>
+                <a:cs typeface="Calibri" pitchFamily="34" charset="-120"/>
+              </a:rPr>
+              <a:t>Abiotic in Xuanwu Lake</a:t>
+            </a:r>
+            <a:endParaRPr lang="en-US" sz="1600" dirty="0"/>
+          </a:p>
+        </p:txBody>
+      </p:sp>
+      <p:sp>
+        <p:nvSpPr>
+          <p:cNvPr id="12" name="Text 10"/>
+          <p:cNvSpPr/>
+          <p:nvPr/>
+        </p:nvSpPr>
+        <p:spPr>
+          <a:xfrm>
+            <a:off x="4937760" y="1691640"/>
+            <a:ext cx="3566160" cy="2743200"/>
+          </a:xfrm>
+          <a:prstGeom prst="rect">
+            <a:avLst/>
+          </a:prstGeom>
+          <a:noFill/>
+          <a:ln/>
+        </p:spPr>
+        <p:txBody>
+          <a:bodyPr wrap="square" rtlCol="0" anchor="ctr"/>
+          <a:lstStyle/>
+          <a:p>
+            <a:pPr marL="342900" indent="-342900">
+              <a:spcAft>
+                <a:spcPts val="600"/>
+              </a:spcAft>
+              <a:buSzPct val="100000"/>
+              <a:buChar char="•"/>
+            </a:pPr>
+            <a:r>
+              <a:rPr lang="en-US" sz="1400" dirty="0">
+                <a:solidFill>
+                  <a:srgbClr val="3D3A36"/>
+                </a:solidFill>
+                <a:latin typeface="Calibri" pitchFamily="34" charset="0"/>
+                <a:ea typeface="Calibri" pitchFamily="34" charset="-122"/>
+                <a:cs typeface="Calibri" pitchFamily="34" charset="-120"/>
+              </a:rPr>
+              <a:t>Water temperature (changes with seasons).</a:t>
+            </a:r>
+            <a:endParaRPr lang="en-US" sz="1400" dirty="0"/>
+          </a:p>
+          <a:p>
+            <a:pPr marL="342900" indent="-342900">
+              <a:spcAft>
+                <a:spcPts val="600"/>
+              </a:spcAft>
+              <a:buSzPct val="100000"/>
+              <a:buChar char="•"/>
+            </a:pPr>
+            <a:r>
+              <a:rPr lang="en-US" sz="1400" dirty="0">
+                <a:solidFill>
+                  <a:srgbClr val="3D3A36"/>
+                </a:solidFill>
+                <a:latin typeface="Calibri" pitchFamily="34" charset="0"/>
+                <a:ea typeface="Calibri" pitchFamily="34" charset="-122"/>
+                <a:cs typeface="Calibri" pitchFamily="34" charset="-120"/>
+              </a:rPr>
+              <a:t>Dissolved oxygen levels.</a:t>
+            </a:r>
+            <a:endParaRPr lang="en-US" sz="1400" dirty="0"/>
+          </a:p>
+          <a:p>
+            <a:pPr marL="342900" indent="-342900">
+              <a:spcAft>
+                <a:spcPts val="600"/>
+              </a:spcAft>
+              <a:buSzPct val="100000"/>
+              <a:buChar char="•"/>
+            </a:pPr>
+            <a:r>
+              <a:rPr lang="en-US" sz="1400" dirty="0">
+                <a:solidFill>
+                  <a:srgbClr val="3D3A36"/>
+                </a:solidFill>
+                <a:latin typeface="Calibri" pitchFamily="34" charset="0"/>
+                <a:ea typeface="Calibri" pitchFamily="34" charset="-122"/>
+                <a:cs typeface="Calibri" pitchFamily="34" charset="-120"/>
+              </a:rPr>
+              <a:t>Sunlight penetration.</a:t>
+            </a:r>
+            <a:endParaRPr lang="en-US" sz="1400" dirty="0"/>
+          </a:p>
+          <a:p>
+            <a:pPr marL="342900" indent="-342900">
+              <a:spcAft>
+                <a:spcPts val="600"/>
+              </a:spcAft>
+              <a:buSzPct val="100000"/>
+              <a:buChar char="•"/>
+            </a:pPr>
+            <a:r>
+              <a:rPr lang="en-US" sz="1400" dirty="0">
+                <a:solidFill>
+                  <a:srgbClr val="3D3A36"/>
+                </a:solidFill>
+                <a:latin typeface="Calibri" pitchFamily="34" charset="0"/>
+                <a:ea typeface="Calibri" pitchFamily="34" charset="-122"/>
+                <a:cs typeface="Calibri" pitchFamily="34" charset="-120"/>
+              </a:rPr>
+              <a:t>pH and nutrient levels.</a:t>
+            </a:r>
+            <a:endParaRPr lang="en-US" sz="1400" dirty="0"/>
+          </a:p>
+        </p:txBody>
+      </p:sp>
+    </p:spTree>
+  </p:cSld>
+  <p:clrMapOvr>
+    <a:masterClrMapping/>
+  </p:clrMapOvr>
+</p:sld>
+</file>
+
+<file path=ppt/slides/slide6.xml><?xml version="1.0" encoding="utf-8"?>
+<p:sld xmlns:a="http://schemas.openxmlformats.org/drawingml/2006/main" xmlns:r="http://schemas.openxmlformats.org/officeDocument/2006/relationships" xmlns:p="http://schemas.openxmlformats.org/presentationml/2006/main">
+  <p:cSld name="Slide 6">
+    <p:bg>
+      <p:bgPr>
+        <a:solidFill>
+          <a:srgbClr val="FAF8F5"/>
+        </a:solidFill>
+      </p:bgPr>
+    </p:bg>
+    <p:spTree>
+      <p:nvGrpSpPr>
+        <p:cNvPr id="1" name=""/>
+        <p:cNvGrpSpPr/>
+        <p:nvPr/>
+      </p:nvGrpSpPr>
+      <p:grpSpPr>
+        <a:xfrm>
+          <a:off x="0" y="0"/>
+          <a:ext cx="0" cy="0"/>
+          <a:chOff x="0" y="0"/>
+          <a:chExt cx="0" cy="0"/>
+        </a:xfrm>
+      </p:grpSpPr>
+      <p:sp>
+        <p:nvSpPr>
+          <p:cNvPr id="2" name="Shape 0"/>
+          <p:cNvSpPr/>
+          <p:nvPr/>
+        </p:nvSpPr>
+        <p:spPr>
+          <a:xfrm>
+            <a:off x="0" y="0"/>
+            <a:ext cx="9144000" cy="822960"/>
+          </a:xfrm>
+          <a:prstGeom prst="rect">
+            <a:avLst/>
+          </a:prstGeom>
+          <a:solidFill>
+            <a:srgbClr val="FFFFFF"/>
+          </a:solidFill>
+          <a:ln/>
+        </p:spPr>
+      </p:sp>
+      <p:sp>
+        <p:nvSpPr>
+          <p:cNvPr id="3" name="Shape 1"/>
+          <p:cNvSpPr/>
+          <p:nvPr/>
+        </p:nvSpPr>
+        <p:spPr>
+          <a:xfrm>
+            <a:off x="0" y="795528"/>
+            <a:ext cx="9144000" cy="27432"/>
+          </a:xfrm>
+          <a:prstGeom prst="rect">
+            <a:avLst/>
+          </a:prstGeom>
+          <a:solidFill>
+            <a:srgbClr val="E9C46A"/>
+          </a:solidFill>
+          <a:ln/>
+        </p:spPr>
+      </p:sp>
+      <p:sp>
+        <p:nvSpPr>
+          <p:cNvPr id="4" name="Text 2"/>
+          <p:cNvSpPr/>
+          <p:nvPr/>
+        </p:nvSpPr>
+        <p:spPr>
+          <a:xfrm>
+            <a:off x="640080" y="91440"/>
+            <a:ext cx="7863840" cy="640080"/>
+          </a:xfrm>
+          <a:prstGeom prst="rect">
+            <a:avLst/>
+          </a:prstGeom>
+          <a:noFill/>
+          <a:ln/>
+        </p:spPr>
+        <p:txBody>
+          <a:bodyPr wrap="square" lIns="0" tIns="0" rIns="0" bIns="0" rtlCol="0" anchor="ctr"/>
+          <a:lstStyle/>
+          <a:p>
+            <a:pPr indent="0" marL="0">
+              <a:buNone/>
+            </a:pPr>
+            <a:r>
+              <a:rPr lang="en-US" sz="2200" b="1" dirty="0">
+                <a:solidFill>
+                  <a:srgbClr val="1B2A4A"/>
+                </a:solidFill>
+                <a:latin typeface="Georgia" pitchFamily="34" charset="0"/>
+                <a:ea typeface="Georgia" pitchFamily="34" charset="-122"/>
+                <a:cs typeface="Georgia" pitchFamily="34" charset="-120"/>
+              </a:rPr>
+              <a:t>Levels of Organisation</a:t>
+            </a:r>
+            <a:endParaRPr lang="en-US" sz="2200" dirty="0"/>
+          </a:p>
+        </p:txBody>
+      </p:sp>
+      <p:sp>
+        <p:nvSpPr>
+          <p:cNvPr id="5" name="Text 3"/>
+          <p:cNvSpPr/>
+          <p:nvPr/>
+        </p:nvSpPr>
+        <p:spPr>
+          <a:xfrm>
+            <a:off x="640080" y="1005840"/>
+            <a:ext cx="7863840" cy="2926080"/>
+          </a:xfrm>
+          <a:prstGeom prst="rect">
+            <a:avLst/>
+          </a:prstGeom>
+          <a:noFill/>
+          <a:ln/>
+        </p:spPr>
+        <p:txBody>
+          <a:bodyPr wrap="square" rtlCol="0" anchor="ctr"/>
+          <a:lstStyle/>
+          <a:p>
+            <a:pPr marL="342900" indent="-342900">
+              <a:spcAft>
+                <a:spcPts val="800"/>
+              </a:spcAft>
+              <a:buSzPct val="100000"/>
+              <a:buChar char="•"/>
+            </a:pPr>
+            <a:r>
+              <a:rPr lang="en-US" sz="1600" dirty="0">
+                <a:solidFill>
+                  <a:srgbClr val="3D3A36"/>
+                </a:solidFill>
+                <a:latin typeface="Calibri" pitchFamily="34" charset="0"/>
+                <a:ea typeface="Calibri" pitchFamily="34" charset="-122"/>
+                <a:cs typeface="Calibri" pitchFamily="34" charset="-120"/>
+              </a:rPr>
+              <a:t>Individual → Population → Community → Ecosystem → Biome → Biosphere.</a:t>
+            </a:r>
+            <a:endParaRPr lang="en-US" sz="1600" dirty="0"/>
+          </a:p>
+          <a:p>
+            <a:pPr marL="342900" indent="-342900">
+              <a:spcAft>
+                <a:spcPts val="800"/>
+              </a:spcAft>
+              <a:buSzPct val="100000"/>
+              <a:buChar char="•"/>
+            </a:pPr>
+            <a:r>
+              <a:rPr lang="en-US" sz="1600" dirty="0">
+                <a:solidFill>
+                  <a:srgbClr val="3D3A36"/>
+                </a:solidFill>
+                <a:latin typeface="Calibri" pitchFamily="34" charset="0"/>
+                <a:ea typeface="Calibri" pitchFamily="34" charset="-122"/>
+                <a:cs typeface="Calibri" pitchFamily="34" charset="-120"/>
+              </a:rPr>
+              <a:t>Xuanwu Lake: one fish (individual) → all carp (population) → all species (community) → lake + abiotic factors (ecosystem).</a:t>
+            </a:r>
+            <a:endParaRPr lang="en-US" sz="1600" dirty="0"/>
+          </a:p>
+          <a:p>
+            <a:pPr marL="342900" indent="-342900">
+              <a:spcAft>
+                <a:spcPts val="800"/>
+              </a:spcAft>
+              <a:buSzPct val="100000"/>
+              <a:buChar char="•"/>
+            </a:pPr>
+            <a:r>
+              <a:rPr lang="en-US" sz="1600" dirty="0">
+                <a:solidFill>
+                  <a:srgbClr val="3D3A36"/>
+                </a:solidFill>
+                <a:latin typeface="Calibri" pitchFamily="34" charset="0"/>
+                <a:ea typeface="Calibri" pitchFamily="34" charset="-122"/>
+                <a:cs typeface="Calibri" pitchFamily="34" charset="-120"/>
+              </a:rPr>
+              <a:t>Korean DMZ: 50 years without human activity → thriving ecosystem.</a:t>
+            </a:r>
+            <a:endParaRPr lang="en-US" sz="1600" dirty="0"/>
+          </a:p>
+          <a:p>
+            <a:pPr marL="342900" indent="-342900">
+              <a:spcAft>
+                <a:spcPts val="800"/>
+              </a:spcAft>
+              <a:buSzPct val="100000"/>
+              <a:buChar char="•"/>
+            </a:pPr>
+            <a:r>
+              <a:rPr lang="en-US" sz="1600" dirty="0">
+                <a:solidFill>
+                  <a:srgbClr val="3D3A36"/>
+                </a:solidFill>
+                <a:latin typeface="Calibri" pitchFamily="34" charset="0"/>
+                <a:ea typeface="Calibri" pitchFamily="34" charset="-122"/>
+                <a:cs typeface="Calibri" pitchFamily="34" charset="-120"/>
+              </a:rPr>
+              <a:t>Black Forest (Schwarzwald), Germany — a temperate forest biome.</a:t>
+            </a:r>
+            <a:endParaRPr lang="en-US" sz="1600" dirty="0"/>
+          </a:p>
+        </p:txBody>
+      </p:sp>
+    </p:spTree>
+  </p:cSld>
+  <p:clrMapOvr>
+    <a:masterClrMapping/>
+  </p:clrMapOvr>
+</p:sld>
+</file>
+
+<file path=ppt/slides/slide7.xml><?xml version="1.0" encoding="utf-8"?>
+<p:sld xmlns:a="http://schemas.openxmlformats.org/drawingml/2006/main" xmlns:r="http://schemas.openxmlformats.org/officeDocument/2006/relationships" xmlns:p="http://schemas.openxmlformats.org/presentationml/2006/main">
+  <p:cSld name="Slide 7">
+    <p:bg>
+      <p:bgPr>
+        <a:solidFill>
+          <a:srgbClr val="FAF8F5"/>
+        </a:solidFill>
+      </p:bgPr>
+    </p:bg>
+    <p:spTree>
+      <p:nvGrpSpPr>
+        <p:cNvPr id="1" name=""/>
+        <p:cNvGrpSpPr/>
+        <p:nvPr/>
+      </p:nvGrpSpPr>
+      <p:grpSpPr>
+        <a:xfrm>
+          <a:off x="0" y="0"/>
+          <a:ext cx="0" cy="0"/>
+          <a:chOff x="0" y="0"/>
+          <a:chExt cx="0" cy="0"/>
+        </a:xfrm>
+      </p:grpSpPr>
+      <p:sp>
+        <p:nvSpPr>
+          <p:cNvPr id="2" name="Shape 0"/>
+          <p:cNvSpPr/>
+          <p:nvPr/>
+        </p:nvSpPr>
+        <p:spPr>
+          <a:xfrm>
+            <a:off x="0" y="0"/>
+            <a:ext cx="9144000" cy="822960"/>
+          </a:xfrm>
+          <a:prstGeom prst="rect">
+            <a:avLst/>
+          </a:prstGeom>
+          <a:solidFill>
+            <a:srgbClr val="FFFFFF"/>
+          </a:solidFill>
+          <a:ln/>
+        </p:spPr>
+      </p:sp>
+      <p:sp>
+        <p:nvSpPr>
+          <p:cNvPr id="3" name="Shape 1"/>
+          <p:cNvSpPr/>
+          <p:nvPr/>
+        </p:nvSpPr>
+        <p:spPr>
+          <a:xfrm>
+            <a:off x="0" y="795528"/>
+            <a:ext cx="9144000" cy="27432"/>
+          </a:xfrm>
+          <a:prstGeom prst="rect">
+            <a:avLst/>
+          </a:prstGeom>
+          <a:solidFill>
+            <a:srgbClr val="E9C46A"/>
+          </a:solidFill>
+          <a:ln/>
+        </p:spPr>
+      </p:sp>
+      <p:sp>
+        <p:nvSpPr>
+          <p:cNvPr id="4" name="Text 2"/>
+          <p:cNvSpPr/>
+          <p:nvPr/>
+        </p:nvSpPr>
+        <p:spPr>
+          <a:xfrm>
+            <a:off x="640080" y="91440"/>
+            <a:ext cx="7863840" cy="640080"/>
+          </a:xfrm>
+          <a:prstGeom prst="rect">
+            <a:avLst/>
+          </a:prstGeom>
+          <a:noFill/>
+          <a:ln/>
+        </p:spPr>
+        <p:txBody>
+          <a:bodyPr wrap="square" lIns="0" tIns="0" rIns="0" bIns="0" rtlCol="0" anchor="ctr"/>
+          <a:lstStyle/>
+          <a:p>
+            <a:pPr indent="0" marL="0">
+              <a:buNone/>
+            </a:pPr>
+            <a:r>
+              <a:rPr lang="en-US" sz="2200" b="1" dirty="0">
+                <a:solidFill>
+                  <a:srgbClr val="1B2A4A"/>
+                </a:solidFill>
+                <a:latin typeface="Georgia" pitchFamily="34" charset="0"/>
+                <a:ea typeface="Georgia" pitchFamily="34" charset="-122"/>
+                <a:cs typeface="Georgia" pitchFamily="34" charset="-120"/>
+              </a:rPr>
+              <a:t>Recommended Videos</a:t>
+            </a:r>
+            <a:endParaRPr lang="en-US" sz="2200" dirty="0"/>
+          </a:p>
+        </p:txBody>
+      </p:sp>
+      <p:sp>
+        <p:nvSpPr>
+          <p:cNvPr id="5" name="Text 3"/>
+          <p:cNvSpPr/>
+          <p:nvPr/>
+        </p:nvSpPr>
+        <p:spPr>
+          <a:xfrm>
+            <a:off x="640080" y="868680"/>
+            <a:ext cx="7863840" cy="274320"/>
+          </a:xfrm>
+          <a:prstGeom prst="rect">
+            <a:avLst/>
+          </a:prstGeom>
+          <a:noFill/>
+          <a:ln/>
+        </p:spPr>
+        <p:txBody>
+          <a:bodyPr wrap="square" rtlCol="0" anchor="ctr"/>
+          <a:lstStyle/>
+          <a:p>
+            <a:pPr indent="0" marL="0">
+              <a:buNone/>
+            </a:pPr>
+            <a:r>
+              <a:rPr lang="en-US" sz="1200" i="1" dirty="0">
+                <a:solidFill>
+                  <a:srgbClr val="6B6660"/>
+                </a:solidFill>
+                <a:latin typeface="Calibri" pitchFamily="34" charset="0"/>
+                <a:ea typeface="Calibri" pitchFamily="34" charset="-122"/>
+                <a:cs typeface="Calibri" pitchFamily="34" charset="-120"/>
+              </a:rPr>
+              <a:t>Search these on YouTube to learn more.</a:t>
+            </a:r>
+            <a:endParaRPr lang="en-US" sz="1200" dirty="0"/>
+          </a:p>
+        </p:txBody>
+      </p:sp>
+      <p:sp>
+        <p:nvSpPr>
+          <p:cNvPr id="6" name="Shape 4"/>
+          <p:cNvSpPr/>
+          <p:nvPr/>
+        </p:nvSpPr>
+        <p:spPr>
+          <a:xfrm>
+            <a:off x="457200" y="1234440"/>
+            <a:ext cx="8229600" cy="1051560"/>
+          </a:xfrm>
+          <a:prstGeom prst="rect">
+            <a:avLst/>
+          </a:prstGeom>
+          <a:solidFill>
+            <a:srgbClr val="FFFFFF"/>
+          </a:solidFill>
+          <a:ln/>
+          <a:effectLst>
+            <a:outerShdw sx="100000" sy="100000" kx="0" ky="0" algn="bl" rotWithShape="0" blurRad="76200" dist="25400" dir="8100000">
+              <a:srgbClr val="000000">
+                <a:alpha val="12000"/>
+              </a:srgbClr>
+            </a:outerShdw>
+          </a:effectLst>
+        </p:spPr>
+      </p:sp>
+      <p:sp>
+        <p:nvSpPr>
+          <p:cNvPr id="7" name="Shape 5"/>
+          <p:cNvSpPr/>
+          <p:nvPr/>
+        </p:nvSpPr>
+        <p:spPr>
+          <a:xfrm>
+            <a:off x="457200" y="1234440"/>
+            <a:ext cx="64008" cy="1051560"/>
+          </a:xfrm>
+          <a:prstGeom prst="rect">
+            <a:avLst/>
+          </a:prstGeom>
+          <a:solidFill>
+            <a:srgbClr val="E9C46A"/>
+          </a:solidFill>
+          <a:ln/>
+        </p:spPr>
+      </p:sp>
+      <p:sp>
+        <p:nvSpPr>
+          <p:cNvPr id="8" name="Text 6"/>
+          <p:cNvSpPr/>
+          <p:nvPr/>
+        </p:nvSpPr>
+        <p:spPr>
+          <a:xfrm>
+            <a:off x="640080" y="1325880"/>
+            <a:ext cx="457200" cy="457200"/>
+          </a:xfrm>
+          <a:prstGeom prst="rect">
+            <a:avLst/>
+          </a:prstGeom>
+          <a:noFill/>
+          <a:ln/>
+        </p:spPr>
+        <p:txBody>
+          <a:bodyPr wrap="square" rtlCol="0" anchor="ctr"/>
+          <a:lstStyle/>
+          <a:p>
+            <a:pPr algn="ctr" indent="0" marL="0">
+              <a:buNone/>
+            </a:pPr>
+            <a:r>
+              <a:rPr lang="en-US" sz="2000" dirty="0">
+                <a:solidFill>
+                  <a:srgbClr val="E9C46A"/>
+                </a:solidFill>
+                <a:latin typeface="Calibri" pitchFamily="34" charset="0"/>
+                <a:ea typeface="Calibri" pitchFamily="34" charset="-122"/>
+                <a:cs typeface="Calibri" pitchFamily="34" charset="-120"/>
+              </a:rPr>
+              <a:t>▶</a:t>
+            </a:r>
+            <a:endParaRPr lang="en-US" sz="2000" dirty="0"/>
+          </a:p>
+        </p:txBody>
+      </p:sp>
+      <p:sp>
+        <p:nvSpPr>
+          <p:cNvPr id="9" name="Text 7"/>
+          <p:cNvSpPr/>
+          <p:nvPr/>
+        </p:nvSpPr>
+        <p:spPr>
+          <a:xfrm>
+            <a:off x="1188720" y="1307592"/>
+            <a:ext cx="7132320" cy="411480"/>
+          </a:xfrm>
+          <a:prstGeom prst="rect">
+            <a:avLst/>
+          </a:prstGeom>
+          <a:noFill/>
+          <a:ln/>
+        </p:spPr>
+        <p:txBody>
+          <a:bodyPr wrap="square" rtlCol="0" anchor="ctr"/>
+          <a:lstStyle/>
+          <a:p>
+            <a:pPr indent="0" marL="0">
+              <a:buNone/>
+            </a:pPr>
+            <a:r>
+              <a:rPr lang="en-US" sz="1400" b="1" dirty="0">
+                <a:solidFill>
+                  <a:srgbClr val="1B2A4A"/>
+                </a:solidFill>
+                <a:latin typeface="Calibri" pitchFamily="34" charset="0"/>
+                <a:ea typeface="Calibri" pitchFamily="34" charset="-122"/>
+                <a:cs typeface="Calibri" pitchFamily="34" charset="-120"/>
+              </a:rPr>
+              <a:t>Ecosystems — Biotic and Abiotic Factors</a:t>
+            </a:r>
+            <a:endParaRPr lang="en-US" sz="1400" dirty="0"/>
+          </a:p>
+        </p:txBody>
+      </p:sp>
+      <p:sp>
+        <p:nvSpPr>
+          <p:cNvPr id="10" name="Text 8"/>
+          <p:cNvSpPr/>
+          <p:nvPr/>
+        </p:nvSpPr>
+        <p:spPr>
+          <a:xfrm>
+            <a:off x="1188720" y="1691640"/>
+            <a:ext cx="7132320" cy="320040"/>
+          </a:xfrm>
+          <a:prstGeom prst="rect">
+            <a:avLst/>
+          </a:prstGeom>
+          <a:noFill/>
+          <a:ln/>
+        </p:spPr>
+        <p:txBody>
+          <a:bodyPr wrap="square" rtlCol="0" anchor="ctr"/>
+          <a:lstStyle/>
+          <a:p>
+            <a:pPr indent="0" marL="0">
+              <a:buNone/>
+            </a:pPr>
+            <a:r>
+              <a:rPr lang="en-US" sz="1100" dirty="0">
+                <a:solidFill>
+                  <a:srgbClr val="6B6660"/>
+                </a:solidFill>
+                <a:latin typeface="Calibri" pitchFamily="34" charset="0"/>
+                <a:ea typeface="Calibri" pitchFamily="34" charset="-122"/>
+                <a:cs typeface="Calibri" pitchFamily="34" charset="-120"/>
+              </a:rPr>
+              <a:t>FuseSchool  •  4 min</a:t>
+            </a:r>
+            <a:endParaRPr lang="en-US" sz="1100" dirty="0"/>
+          </a:p>
+        </p:txBody>
+      </p:sp>
+      <p:sp>
+        <p:nvSpPr>
+          <p:cNvPr id="11" name="Shape 9"/>
+          <p:cNvSpPr/>
+          <p:nvPr/>
+        </p:nvSpPr>
+        <p:spPr>
+          <a:xfrm>
+            <a:off x="457200" y="2423160"/>
+            <a:ext cx="8229600" cy="1051560"/>
+          </a:xfrm>
+          <a:prstGeom prst="rect">
+            <a:avLst/>
+          </a:prstGeom>
+          <a:solidFill>
+            <a:srgbClr val="FFFFFF"/>
+          </a:solidFill>
+          <a:ln/>
+          <a:effectLst>
+            <a:outerShdw sx="100000" sy="100000" kx="0" ky="0" algn="bl" rotWithShape="0" blurRad="76200" dist="25400" dir="8100000">
+              <a:srgbClr val="000000">
+                <a:alpha val="12000"/>
+              </a:srgbClr>
+            </a:outerShdw>
+          </a:effectLst>
+        </p:spPr>
+      </p:sp>
+      <p:sp>
+        <p:nvSpPr>
+          <p:cNvPr id="12" name="Shape 10"/>
+          <p:cNvSpPr/>
+          <p:nvPr/>
+        </p:nvSpPr>
+        <p:spPr>
+          <a:xfrm>
+            <a:off x="457200" y="2423160"/>
+            <a:ext cx="64008" cy="1051560"/>
+          </a:xfrm>
+          <a:prstGeom prst="rect">
+            <a:avLst/>
+          </a:prstGeom>
+          <a:solidFill>
+            <a:srgbClr val="E9C46A"/>
+          </a:solidFill>
+          <a:ln/>
+        </p:spPr>
+      </p:sp>
+      <p:sp>
+        <p:nvSpPr>
+          <p:cNvPr id="13" name="Text 11"/>
+          <p:cNvSpPr/>
+          <p:nvPr/>
+        </p:nvSpPr>
+        <p:spPr>
+          <a:xfrm>
+            <a:off x="640080" y="2514600"/>
+            <a:ext cx="457200" cy="457200"/>
+          </a:xfrm>
+          <a:prstGeom prst="rect">
+            <a:avLst/>
+          </a:prstGeom>
+          <a:noFill/>
+          <a:ln/>
+        </p:spPr>
+        <p:txBody>
+          <a:bodyPr wrap="square" rtlCol="0" anchor="ctr"/>
+          <a:lstStyle/>
+          <a:p>
+            <a:pPr algn="ctr" indent="0" marL="0">
+              <a:buNone/>
+            </a:pPr>
+            <a:r>
+              <a:rPr lang="en-US" sz="2000" dirty="0">
+                <a:solidFill>
+                  <a:srgbClr val="E9C46A"/>
+                </a:solidFill>
+                <a:latin typeface="Calibri" pitchFamily="34" charset="0"/>
+                <a:ea typeface="Calibri" pitchFamily="34" charset="-122"/>
+                <a:cs typeface="Calibri" pitchFamily="34" charset="-120"/>
+              </a:rPr>
+              <a:t>▶</a:t>
+            </a:r>
+            <a:endParaRPr lang="en-US" sz="2000" dirty="0"/>
+          </a:p>
+        </p:txBody>
+      </p:sp>
+      <p:sp>
+        <p:nvSpPr>
+          <p:cNvPr id="14" name="Text 12"/>
+          <p:cNvSpPr/>
+          <p:nvPr/>
+        </p:nvSpPr>
+        <p:spPr>
+          <a:xfrm>
+            <a:off x="1188720" y="2496312"/>
+            <a:ext cx="7132320" cy="411480"/>
+          </a:xfrm>
+          <a:prstGeom prst="rect">
+            <a:avLst/>
+          </a:prstGeom>
+          <a:noFill/>
+          <a:ln/>
+        </p:spPr>
+        <p:txBody>
+          <a:bodyPr wrap="square" rtlCol="0" anchor="ctr"/>
+          <a:lstStyle/>
+          <a:p>
+            <a:pPr indent="0" marL="0">
+              <a:buNone/>
+            </a:pPr>
+            <a:r>
+              <a:rPr lang="en-US" sz="1400" b="1" dirty="0">
+                <a:solidFill>
+                  <a:srgbClr val="1B2A4A"/>
+                </a:solidFill>
+                <a:latin typeface="Calibri" pitchFamily="34" charset="0"/>
+                <a:ea typeface="Calibri" pitchFamily="34" charset="-122"/>
+                <a:cs typeface="Calibri" pitchFamily="34" charset="-120"/>
+              </a:rPr>
+              <a:t>What is an Ecosystem?</a:t>
+            </a:r>
+            <a:endParaRPr lang="en-US" sz="1400" dirty="0"/>
+          </a:p>
+        </p:txBody>
+      </p:sp>
+      <p:sp>
+        <p:nvSpPr>
+          <p:cNvPr id="15" name="Text 13"/>
+          <p:cNvSpPr/>
+          <p:nvPr/>
+        </p:nvSpPr>
+        <p:spPr>
+          <a:xfrm>
+            <a:off x="1188720" y="2880360"/>
+            <a:ext cx="7132320" cy="320040"/>
+          </a:xfrm>
+          <a:prstGeom prst="rect">
+            <a:avLst/>
+          </a:prstGeom>
+          <a:noFill/>
+          <a:ln/>
+        </p:spPr>
+        <p:txBody>
+          <a:bodyPr wrap="square" rtlCol="0" anchor="ctr"/>
+          <a:lstStyle/>
+          <a:p>
+            <a:pPr indent="0" marL="0">
+              <a:buNone/>
+            </a:pPr>
+            <a:r>
+              <a:rPr lang="en-US" sz="1100" dirty="0">
+                <a:solidFill>
+                  <a:srgbClr val="6B6660"/>
+                </a:solidFill>
+                <a:latin typeface="Calibri" pitchFamily="34" charset="0"/>
+                <a:ea typeface="Calibri" pitchFamily="34" charset="-122"/>
+                <a:cs typeface="Calibri" pitchFamily="34" charset="-120"/>
+              </a:rPr>
+              <a:t>Crash Course Kids  •  4 min</a:t>
+            </a:r>
+            <a:endParaRPr lang="en-US" sz="1100" dirty="0"/>
+          </a:p>
+        </p:txBody>
+      </p:sp>
+      <p:sp>
+        <p:nvSpPr>
+          <p:cNvPr id="16" name="Shape 14"/>
+          <p:cNvSpPr/>
+          <p:nvPr/>
+        </p:nvSpPr>
+        <p:spPr>
+          <a:xfrm>
+            <a:off x="457200" y="3611880"/>
+            <a:ext cx="8229600" cy="1051560"/>
+          </a:xfrm>
+          <a:prstGeom prst="rect">
+            <a:avLst/>
+          </a:prstGeom>
+          <a:solidFill>
+            <a:srgbClr val="FFFFFF"/>
+          </a:solidFill>
+          <a:ln/>
+          <a:effectLst>
+            <a:outerShdw sx="100000" sy="100000" kx="0" ky="0" algn="bl" rotWithShape="0" blurRad="76200" dist="25400" dir="8100000">
+              <a:srgbClr val="000000">
+                <a:alpha val="12000"/>
+              </a:srgbClr>
+            </a:outerShdw>
+          </a:effectLst>
+        </p:spPr>
+      </p:sp>
+      <p:sp>
+        <p:nvSpPr>
+          <p:cNvPr id="17" name="Shape 15"/>
+          <p:cNvSpPr/>
+          <p:nvPr/>
+        </p:nvSpPr>
+        <p:spPr>
+          <a:xfrm>
+            <a:off x="457200" y="3611880"/>
+            <a:ext cx="64008" cy="1051560"/>
+          </a:xfrm>
+          <a:prstGeom prst="rect">
+            <a:avLst/>
+          </a:prstGeom>
+          <a:solidFill>
+            <a:srgbClr val="E9C46A"/>
+          </a:solidFill>
+          <a:ln/>
+        </p:spPr>
+      </p:sp>
+      <p:sp>
+        <p:nvSpPr>
+          <p:cNvPr id="18" name="Text 16"/>
+          <p:cNvSpPr/>
+          <p:nvPr/>
+        </p:nvSpPr>
+        <p:spPr>
+          <a:xfrm>
+            <a:off x="640080" y="3703320"/>
+            <a:ext cx="457200" cy="457200"/>
+          </a:xfrm>
+          <a:prstGeom prst="rect">
+            <a:avLst/>
+          </a:prstGeom>
+          <a:noFill/>
+          <a:ln/>
+        </p:spPr>
+        <p:txBody>
+          <a:bodyPr wrap="square" rtlCol="0" anchor="ctr"/>
+          <a:lstStyle/>
+          <a:p>
+            <a:pPr algn="ctr" indent="0" marL="0">
+              <a:buNone/>
+            </a:pPr>
+            <a:r>
+              <a:rPr lang="en-US" sz="2000" dirty="0">
+                <a:solidFill>
+                  <a:srgbClr val="E9C46A"/>
+                </a:solidFill>
+                <a:latin typeface="Calibri" pitchFamily="34" charset="0"/>
+                <a:ea typeface="Calibri" pitchFamily="34" charset="-122"/>
+                <a:cs typeface="Calibri" pitchFamily="34" charset="-120"/>
+              </a:rPr>
+              <a:t>▶</a:t>
+            </a:r>
+            <a:endParaRPr lang="en-US" sz="2000" dirty="0"/>
+          </a:p>
+        </p:txBody>
+      </p:sp>
+      <p:sp>
+        <p:nvSpPr>
+          <p:cNvPr id="19" name="Text 17"/>
+          <p:cNvSpPr/>
+          <p:nvPr/>
+        </p:nvSpPr>
+        <p:spPr>
+          <a:xfrm>
+            <a:off x="1188720" y="3685032"/>
+            <a:ext cx="7132320" cy="411480"/>
+          </a:xfrm>
+          <a:prstGeom prst="rect">
+            <a:avLst/>
+          </a:prstGeom>
+          <a:noFill/>
+          <a:ln/>
+        </p:spPr>
+        <p:txBody>
+          <a:bodyPr wrap="square" rtlCol="0" anchor="ctr"/>
+          <a:lstStyle/>
+          <a:p>
+            <a:pPr indent="0" marL="0">
+              <a:buNone/>
+            </a:pPr>
+            <a:r>
+              <a:rPr lang="en-US" sz="1400" b="1" dirty="0">
+                <a:solidFill>
+                  <a:srgbClr val="1B2A4A"/>
+                </a:solidFill>
+                <a:latin typeface="Calibri" pitchFamily="34" charset="0"/>
+                <a:ea typeface="Calibri" pitchFamily="34" charset="-122"/>
+                <a:cs typeface="Calibri" pitchFamily="34" charset="-120"/>
+              </a:rPr>
+              <a:t>Levels of Organisation in an Ecosystem</a:t>
+            </a:r>
+            <a:endParaRPr lang="en-US" sz="1400" dirty="0"/>
+          </a:p>
+        </p:txBody>
+      </p:sp>
+      <p:sp>
+        <p:nvSpPr>
+          <p:cNvPr id="20" name="Text 18"/>
+          <p:cNvSpPr/>
+          <p:nvPr/>
+        </p:nvSpPr>
+        <p:spPr>
+          <a:xfrm>
+            <a:off x="1188720" y="4069080"/>
+            <a:ext cx="7132320" cy="320040"/>
+          </a:xfrm>
+          <a:prstGeom prst="rect">
+            <a:avLst/>
+          </a:prstGeom>
+          <a:noFill/>
+          <a:ln/>
+        </p:spPr>
+        <p:txBody>
+          <a:bodyPr wrap="square" rtlCol="0" anchor="ctr"/>
+          <a:lstStyle/>
+          <a:p>
+            <a:pPr indent="0" marL="0">
+              <a:buNone/>
+            </a:pPr>
+            <a:r>
+              <a:rPr lang="en-US" sz="1100" dirty="0">
+                <a:solidFill>
+                  <a:srgbClr val="6B6660"/>
+                </a:solidFill>
+                <a:latin typeface="Calibri" pitchFamily="34" charset="0"/>
+                <a:ea typeface="Calibri" pitchFamily="34" charset="-122"/>
+                <a:cs typeface="Calibri" pitchFamily="34" charset="-120"/>
+              </a:rPr>
+              <a:t>Cognito  •  5 min</a:t>
+            </a:r>
+            <a:endParaRPr lang="en-US" sz="1100" dirty="0"/>
+          </a:p>
+        </p:txBody>
+      </p:sp>
+    </p:spTree>
+  </p:cSld>
+  <p:clrMapOvr>
+    <a:masterClrMapping/>
+  </p:clrMapOvr>
+</p:sld>
+</file>
+
+<file path=ppt/slides/slide8.xml><?xml version="1.0" encoding="utf-8"?>
+<p:sld xmlns:a="http://schemas.openxmlformats.org/drawingml/2006/main" xmlns:r="http://schemas.openxmlformats.org/officeDocument/2006/relationships" xmlns:p="http://schemas.openxmlformats.org/presentationml/2006/main">
+  <p:cSld name="Slide 8">
+    <p:spTree>
+      <p:nvGrpSpPr>
+        <p:cNvPr id="1" name=""/>
+        <p:cNvGrpSpPr/>
+        <p:nvPr/>
+      </p:nvGrpSpPr>
+      <p:grpSpPr>
+        <a:xfrm>
+          <a:off x="0" y="0"/>
+          <a:ext cx="0" cy="0"/>
+          <a:chOff x="0" y="0"/>
+          <a:chExt cx="0" cy="0"/>
+        </a:xfrm>
+      </p:grpSpPr>
+      <p:sp>
+        <p:nvSpPr>
+          <p:cNvPr id="2" name="Shape 0"/>
+          <p:cNvSpPr/>
+          <p:nvPr/>
+        </p:nvSpPr>
+        <p:spPr>
+          <a:xfrm>
+            <a:off x="0" y="0"/>
             <a:ext cx="9144000" cy="5143500"/>
           </a:xfrm>
           <a:prstGeom prst="rect">
@@ -3074,7 +4839,7 @@
             <a:avLst/>
           </a:prstGeom>
           <a:solidFill>
-            <a:srgbClr val="1B2A4A"/>
+            <a:srgbClr val="E9C46A"/>
           </a:solidFill>
           <a:ln/>
         </p:spPr>
@@ -3126,7 +4891,7 @@
         </p:nvSpPr>
         <p:spPr>
           <a:xfrm>
-            <a:off x="731520" y="2468880"/>
+            <a:off x="731520" y="2560320"/>
             <a:ext cx="7680960" cy="548640"/>
           </a:xfrm>
           <a:prstGeom prst="rect">
@@ -3143,48 +4908,9 @@
               <a:buNone/>
             </a:pPr>
             <a:r>
-              <a:rPr lang="en-US" sz="1800" dirty="0">
+              <a:rPr lang="en-US" sz="2000" dirty="0">
                 <a:solidFill>
-                  <a:srgbClr val="1B2A4A"/>
-                </a:solidFill>
-                <a:latin typeface="Calibri" pitchFamily="34" charset="0"/>
-                <a:ea typeface="Calibri" pitchFamily="34" charset="-122"/>
-                <a:cs typeface="Calibri" pitchFamily="34" charset="-120"/>
-              </a:rPr>
-              <a:t>learnlattice.org/students/exam-revision</a:t>
-            </a:r>
-            <a:endParaRPr lang="en-US" sz="1800" dirty="0"/>
-          </a:p>
-        </p:txBody>
-      </p:sp>
-      <p:sp>
-        <p:nvSpPr>
-          <p:cNvPr id="6" name="Text 4"/>
-          <p:cNvSpPr/>
-          <p:nvPr/>
-        </p:nvSpPr>
-        <p:spPr>
-          <a:xfrm>
-            <a:off x="731520" y="3200400"/>
-            <a:ext cx="7680960" cy="457200"/>
-          </a:xfrm>
-          <a:prstGeom prst="rect">
-            <a:avLst/>
-          </a:prstGeom>
-          <a:noFill/>
-          <a:ln/>
-        </p:spPr>
-        <p:txBody>
-          <a:bodyPr wrap="square" rtlCol="0" anchor="ctr"/>
-          <a:lstStyle/>
-          <a:p>
-            <a:pPr algn="ctr" indent="0" marL="0">
-              <a:buNone/>
-            </a:pPr>
-            <a:r>
-              <a:rPr lang="en-US" sz="1400" dirty="0">
-                <a:solidFill>
-                  <a:srgbClr val="9B9690"/>
+                  <a:srgbClr val="E9C46A"/>
                 </a:solidFill>
                 <a:latin typeface="Calibri" pitchFamily="34" charset="0"/>
                 <a:ea typeface="Calibri" pitchFamily="34" charset="-122"/>
@@ -3192,7 +4918,7 @@
               </a:rPr>
               <a:t>mrzocchi.com</a:t>
             </a:r>
-            <a:endParaRPr lang="en-US" sz="1400" dirty="0"/>
+            <a:endParaRPr lang="en-US" sz="2000" dirty="0"/>
           </a:p>
         </p:txBody>
       </p:sp>
